--- a/docs/pptx/auc3/ritu-auc3-linsubhr-sens-grade2.pptx
+++ b/docs/pptx/auc3/ritu-auc3-linsubhr-sens-grade2.pptx
@@ -2443,7 +2443,7 @@
           </p:nvSpPr>
           <p:spPr>
             <a:xfrm>
-              <a:off x="1972656" y="2073503"/>
+              <a:off x="1971769" y="2073503"/>
               <a:ext cx="0" cy="3649639"/>
             </a:xfrm>
             <a:custGeom>
@@ -2486,7 +2486,7 @@
           </p:nvSpPr>
           <p:spPr>
             <a:xfrm>
-              <a:off x="4071747" y="2073503"/>
+              <a:off x="4066896" y="2073503"/>
               <a:ext cx="0" cy="3649639"/>
             </a:xfrm>
             <a:custGeom>
@@ -2529,7 +2529,7 @@
           </p:nvSpPr>
           <p:spPr>
             <a:xfrm>
-              <a:off x="6170837" y="2073503"/>
+              <a:off x="6162023" y="2073503"/>
               <a:ext cx="0" cy="3649639"/>
             </a:xfrm>
             <a:custGeom>
@@ -2572,7 +2572,7 @@
           </p:nvSpPr>
           <p:spPr>
             <a:xfrm>
-              <a:off x="8269927" y="2073503"/>
+              <a:off x="8257149" y="2073503"/>
               <a:ext cx="0" cy="3649639"/>
             </a:xfrm>
             <a:custGeom>
@@ -2830,7 +2830,7 @@
           </p:nvSpPr>
           <p:spPr>
             <a:xfrm>
-              <a:off x="923111" y="2073503"/>
+              <a:off x="924206" y="2073503"/>
               <a:ext cx="0" cy="3649639"/>
             </a:xfrm>
             <a:custGeom>
@@ -2873,7 +2873,7 @@
           </p:nvSpPr>
           <p:spPr>
             <a:xfrm>
-              <a:off x="3022201" y="2073503"/>
+              <a:off x="3019333" y="2073503"/>
               <a:ext cx="0" cy="3649639"/>
             </a:xfrm>
             <a:custGeom>
@@ -2916,7 +2916,7 @@
           </p:nvSpPr>
           <p:spPr>
             <a:xfrm>
-              <a:off x="5121292" y="2073503"/>
+              <a:off x="5114459" y="2073503"/>
               <a:ext cx="0" cy="3649639"/>
             </a:xfrm>
             <a:custGeom>
@@ -2959,7 +2959,7 @@
           </p:nvSpPr>
           <p:spPr>
             <a:xfrm>
-              <a:off x="7220382" y="2073503"/>
+              <a:off x="7209586" y="2073503"/>
               <a:ext cx="0" cy="3649639"/>
             </a:xfrm>
             <a:custGeom>
@@ -3002,612 +3002,612 @@
           </p:nvSpPr>
           <p:spPr>
             <a:xfrm>
-              <a:off x="1172049" y="2819071"/>
-              <a:ext cx="7090630" cy="2539189"/>
+              <a:off x="1172049" y="2707973"/>
+              <a:ext cx="7090630" cy="2656049"/>
             </a:xfrm>
             <a:custGeom>
               <a:avLst/>
               <a:pathLst>
-                <a:path w="7090630" h="2539189">
+                <a:path w="7090630" h="2656049">
                   <a:moveTo>
                     <a:pt x="0" y="0"/>
                   </a:moveTo>
                   <a:lnTo>
-                    <a:pt x="71622" y="71563"/>
-                  </a:lnTo>
-                  <a:lnTo>
-                    <a:pt x="143245" y="141255"/>
-                  </a:lnTo>
-                  <a:lnTo>
-                    <a:pt x="214867" y="209126"/>
-                  </a:lnTo>
-                  <a:lnTo>
-                    <a:pt x="286490" y="275224"/>
-                  </a:lnTo>
-                  <a:lnTo>
-                    <a:pt x="358112" y="339594"/>
-                  </a:lnTo>
-                  <a:lnTo>
-                    <a:pt x="429735" y="402281"/>
-                  </a:lnTo>
-                  <a:lnTo>
-                    <a:pt x="501357" y="463331"/>
-                  </a:lnTo>
-                  <a:lnTo>
-                    <a:pt x="572980" y="522784"/>
-                  </a:lnTo>
-                  <a:lnTo>
-                    <a:pt x="644602" y="580684"/>
-                  </a:lnTo>
-                  <a:lnTo>
-                    <a:pt x="716225" y="637071"/>
-                  </a:lnTo>
-                  <a:lnTo>
-                    <a:pt x="787847" y="691984"/>
-                  </a:lnTo>
-                  <a:lnTo>
-                    <a:pt x="859470" y="745462"/>
-                  </a:lnTo>
-                  <a:lnTo>
-                    <a:pt x="931092" y="797542"/>
-                  </a:lnTo>
-                  <a:lnTo>
-                    <a:pt x="1002715" y="848261"/>
-                  </a:lnTo>
-                  <a:lnTo>
-                    <a:pt x="1074337" y="897654"/>
-                  </a:lnTo>
-                  <a:lnTo>
-                    <a:pt x="1145960" y="945757"/>
-                  </a:lnTo>
-                  <a:lnTo>
-                    <a:pt x="1217582" y="992602"/>
-                  </a:lnTo>
-                  <a:lnTo>
-                    <a:pt x="1289205" y="1038223"/>
-                  </a:lnTo>
-                  <a:lnTo>
-                    <a:pt x="1360827" y="1082652"/>
-                  </a:lnTo>
-                  <a:lnTo>
-                    <a:pt x="1432450" y="1125920"/>
-                  </a:lnTo>
-                  <a:lnTo>
-                    <a:pt x="1504073" y="1168056"/>
-                  </a:lnTo>
-                  <a:lnTo>
-                    <a:pt x="1575695" y="1209092"/>
-                  </a:lnTo>
-                  <a:lnTo>
-                    <a:pt x="1647318" y="1249055"/>
-                  </a:lnTo>
-                  <a:lnTo>
-                    <a:pt x="1718940" y="1287974"/>
-                  </a:lnTo>
-                  <a:lnTo>
-                    <a:pt x="1790563" y="1325875"/>
-                  </a:lnTo>
-                  <a:lnTo>
-                    <a:pt x="1862185" y="1362786"/>
-                  </a:lnTo>
-                  <a:lnTo>
-                    <a:pt x="1933808" y="1398732"/>
-                  </a:lnTo>
-                  <a:lnTo>
-                    <a:pt x="2005430" y="1433739"/>
-                  </a:lnTo>
-                  <a:lnTo>
-                    <a:pt x="2077053" y="1467831"/>
-                  </a:lnTo>
-                  <a:lnTo>
-                    <a:pt x="2148675" y="1501032"/>
-                  </a:lnTo>
-                  <a:lnTo>
-                    <a:pt x="2220298" y="1533365"/>
-                  </a:lnTo>
-                  <a:lnTo>
-                    <a:pt x="2291920" y="1564853"/>
-                  </a:lnTo>
-                  <a:lnTo>
-                    <a:pt x="2363543" y="1595518"/>
-                  </a:lnTo>
-                  <a:lnTo>
-                    <a:pt x="2435165" y="1625382"/>
-                  </a:lnTo>
-                  <a:lnTo>
-                    <a:pt x="2506788" y="1654465"/>
-                  </a:lnTo>
-                  <a:lnTo>
-                    <a:pt x="2578410" y="1682788"/>
-                  </a:lnTo>
-                  <a:lnTo>
-                    <a:pt x="2650033" y="1710371"/>
-                  </a:lnTo>
-                  <a:lnTo>
-                    <a:pt x="2721655" y="1737233"/>
-                  </a:lnTo>
-                  <a:lnTo>
-                    <a:pt x="2793278" y="1763393"/>
-                  </a:lnTo>
-                  <a:lnTo>
-                    <a:pt x="2864901" y="1788869"/>
-                  </a:lnTo>
-                  <a:lnTo>
-                    <a:pt x="2936523" y="1813680"/>
-                  </a:lnTo>
-                  <a:lnTo>
-                    <a:pt x="3008146" y="1837842"/>
-                  </a:lnTo>
-                  <a:lnTo>
-                    <a:pt x="3079768" y="1861372"/>
-                  </a:lnTo>
-                  <a:lnTo>
-                    <a:pt x="3151391" y="1884288"/>
-                  </a:lnTo>
-                  <a:lnTo>
-                    <a:pt x="3223013" y="1906604"/>
-                  </a:lnTo>
-                  <a:lnTo>
-                    <a:pt x="3294636" y="1905081"/>
-                  </a:lnTo>
-                  <a:lnTo>
-                    <a:pt x="3366258" y="1901043"/>
-                  </a:lnTo>
-                  <a:lnTo>
-                    <a:pt x="3437881" y="1896987"/>
-                  </a:lnTo>
-                  <a:lnTo>
-                    <a:pt x="3509503" y="1892910"/>
-                  </a:lnTo>
-                  <a:lnTo>
-                    <a:pt x="3581126" y="1888814"/>
-                  </a:lnTo>
-                  <a:lnTo>
-                    <a:pt x="3652748" y="1884698"/>
-                  </a:lnTo>
-                  <a:lnTo>
-                    <a:pt x="3724371" y="1880562"/>
-                  </a:lnTo>
-                  <a:lnTo>
-                    <a:pt x="3795993" y="1876406"/>
-                  </a:lnTo>
-                  <a:lnTo>
-                    <a:pt x="3867616" y="1872229"/>
-                  </a:lnTo>
-                  <a:lnTo>
-                    <a:pt x="3939238" y="1868033"/>
-                  </a:lnTo>
-                  <a:lnTo>
-                    <a:pt x="4010861" y="1863816"/>
-                  </a:lnTo>
-                  <a:lnTo>
-                    <a:pt x="4082483" y="1859579"/>
-                  </a:lnTo>
-                  <a:lnTo>
-                    <a:pt x="4154106" y="1855321"/>
-                  </a:lnTo>
-                  <a:lnTo>
-                    <a:pt x="4225729" y="1851043"/>
-                  </a:lnTo>
-                  <a:lnTo>
-                    <a:pt x="4297351" y="1846744"/>
-                  </a:lnTo>
-                  <a:lnTo>
-                    <a:pt x="4368974" y="1842424"/>
-                  </a:lnTo>
-                  <a:lnTo>
-                    <a:pt x="4440596" y="1838083"/>
-                  </a:lnTo>
-                  <a:lnTo>
-                    <a:pt x="4512219" y="1833721"/>
-                  </a:lnTo>
-                  <a:lnTo>
-                    <a:pt x="4583841" y="1829338"/>
-                  </a:lnTo>
-                  <a:lnTo>
-                    <a:pt x="4655464" y="1824933"/>
-                  </a:lnTo>
-                  <a:lnTo>
-                    <a:pt x="4727086" y="1820508"/>
-                  </a:lnTo>
-                  <a:lnTo>
-                    <a:pt x="4798709" y="1816061"/>
-                  </a:lnTo>
-                  <a:lnTo>
-                    <a:pt x="4870331" y="1811592"/>
-                  </a:lnTo>
-                  <a:lnTo>
-                    <a:pt x="4941954" y="1807102"/>
-                  </a:lnTo>
-                  <a:lnTo>
-                    <a:pt x="5013576" y="1802590"/>
-                  </a:lnTo>
-                  <a:lnTo>
-                    <a:pt x="5085199" y="1798056"/>
-                  </a:lnTo>
-                  <a:lnTo>
-                    <a:pt x="5156821" y="1793500"/>
-                  </a:lnTo>
-                  <a:lnTo>
-                    <a:pt x="5228444" y="1788922"/>
-                  </a:lnTo>
-                  <a:lnTo>
-                    <a:pt x="5300066" y="1784322"/>
-                  </a:lnTo>
-                  <a:lnTo>
-                    <a:pt x="5371689" y="1779699"/>
-                  </a:lnTo>
-                  <a:lnTo>
-                    <a:pt x="5443311" y="1775054"/>
-                  </a:lnTo>
-                  <a:lnTo>
-                    <a:pt x="5514934" y="1770387"/>
-                  </a:lnTo>
-                  <a:lnTo>
-                    <a:pt x="5586557" y="1765697"/>
-                  </a:lnTo>
-                  <a:lnTo>
-                    <a:pt x="5658179" y="1760984"/>
-                  </a:lnTo>
-                  <a:lnTo>
-                    <a:pt x="5729802" y="1756249"/>
-                  </a:lnTo>
-                  <a:lnTo>
-                    <a:pt x="5801424" y="1751490"/>
-                  </a:lnTo>
-                  <a:lnTo>
-                    <a:pt x="5873047" y="1746709"/>
-                  </a:lnTo>
-                  <a:lnTo>
-                    <a:pt x="5944669" y="1741904"/>
-                  </a:lnTo>
-                  <a:lnTo>
-                    <a:pt x="6016292" y="1737076"/>
-                  </a:lnTo>
-                  <a:lnTo>
-                    <a:pt x="6087914" y="1732224"/>
-                  </a:lnTo>
-                  <a:lnTo>
-                    <a:pt x="6159537" y="1727349"/>
-                  </a:lnTo>
-                  <a:lnTo>
-                    <a:pt x="6231159" y="1722451"/>
-                  </a:lnTo>
-                  <a:lnTo>
-                    <a:pt x="6302782" y="1717529"/>
-                  </a:lnTo>
-                  <a:lnTo>
-                    <a:pt x="6374404" y="1712582"/>
-                  </a:lnTo>
-                  <a:lnTo>
-                    <a:pt x="6446027" y="1707612"/>
-                  </a:lnTo>
-                  <a:lnTo>
-                    <a:pt x="6517649" y="1702618"/>
-                  </a:lnTo>
-                  <a:lnTo>
-                    <a:pt x="6589272" y="1697600"/>
-                  </a:lnTo>
-                  <a:lnTo>
-                    <a:pt x="6660894" y="1692557"/>
-                  </a:lnTo>
-                  <a:lnTo>
-                    <a:pt x="6732517" y="1687490"/>
-                  </a:lnTo>
-                  <a:lnTo>
-                    <a:pt x="6804139" y="1682398"/>
-                  </a:lnTo>
-                  <a:lnTo>
-                    <a:pt x="6875762" y="1677282"/>
-                  </a:lnTo>
-                  <a:lnTo>
-                    <a:pt x="6947385" y="1672140"/>
-                  </a:lnTo>
-                  <a:lnTo>
-                    <a:pt x="7019007" y="1666974"/>
-                  </a:lnTo>
-                  <a:lnTo>
-                    <a:pt x="7090630" y="1661783"/>
-                  </a:lnTo>
-                  <a:lnTo>
-                    <a:pt x="7090630" y="2539189"/>
-                  </a:lnTo>
-                  <a:lnTo>
-                    <a:pt x="7019007" y="2533849"/>
-                  </a:lnTo>
-                  <a:lnTo>
-                    <a:pt x="6947385" y="2528366"/>
-                  </a:lnTo>
-                  <a:lnTo>
-                    <a:pt x="6875762" y="2522735"/>
-                  </a:lnTo>
-                  <a:lnTo>
-                    <a:pt x="6804139" y="2516953"/>
-                  </a:lnTo>
-                  <a:lnTo>
-                    <a:pt x="6732517" y="2511016"/>
-                  </a:lnTo>
-                  <a:lnTo>
-                    <a:pt x="6660894" y="2504920"/>
-                  </a:lnTo>
-                  <a:lnTo>
-                    <a:pt x="6589272" y="2498660"/>
-                  </a:lnTo>
-                  <a:lnTo>
-                    <a:pt x="6517649" y="2492233"/>
-                  </a:lnTo>
-                  <a:lnTo>
-                    <a:pt x="6446027" y="2485632"/>
-                  </a:lnTo>
-                  <a:lnTo>
-                    <a:pt x="6374404" y="2478855"/>
-                  </a:lnTo>
-                  <a:lnTo>
-                    <a:pt x="6302782" y="2471895"/>
-                  </a:lnTo>
-                  <a:lnTo>
-                    <a:pt x="6231159" y="2464749"/>
-                  </a:lnTo>
-                  <a:lnTo>
-                    <a:pt x="6159537" y="2457411"/>
-                  </a:lnTo>
-                  <a:lnTo>
-                    <a:pt x="6087914" y="2449877"/>
-                  </a:lnTo>
-                  <a:lnTo>
-                    <a:pt x="6016292" y="2442139"/>
-                  </a:lnTo>
-                  <a:lnTo>
-                    <a:pt x="5944669" y="2434195"/>
-                  </a:lnTo>
-                  <a:lnTo>
-                    <a:pt x="5873047" y="2426037"/>
-                  </a:lnTo>
-                  <a:lnTo>
-                    <a:pt x="5801424" y="2417660"/>
-                  </a:lnTo>
-                  <a:lnTo>
-                    <a:pt x="5729802" y="2409059"/>
-                  </a:lnTo>
-                  <a:lnTo>
-                    <a:pt x="5658179" y="2400226"/>
-                  </a:lnTo>
-                  <a:lnTo>
-                    <a:pt x="5586557" y="2391157"/>
-                  </a:lnTo>
-                  <a:lnTo>
-                    <a:pt x="5514934" y="2381844"/>
-                  </a:lnTo>
-                  <a:lnTo>
-                    <a:pt x="5443311" y="2372281"/>
-                  </a:lnTo>
-                  <a:lnTo>
-                    <a:pt x="5371689" y="2362461"/>
-                  </a:lnTo>
-                  <a:lnTo>
-                    <a:pt x="5300066" y="2352379"/>
-                  </a:lnTo>
-                  <a:lnTo>
-                    <a:pt x="5228444" y="2342025"/>
-                  </a:lnTo>
-                  <a:lnTo>
-                    <a:pt x="5156821" y="2331394"/>
-                  </a:lnTo>
-                  <a:lnTo>
-                    <a:pt x="5085199" y="2320477"/>
-                  </a:lnTo>
-                  <a:lnTo>
-                    <a:pt x="5013576" y="2309267"/>
-                  </a:lnTo>
-                  <a:lnTo>
-                    <a:pt x="4941954" y="2297757"/>
-                  </a:lnTo>
-                  <a:lnTo>
-                    <a:pt x="4870331" y="2285937"/>
-                  </a:lnTo>
-                  <a:lnTo>
-                    <a:pt x="4798709" y="2273801"/>
-                  </a:lnTo>
-                  <a:lnTo>
-                    <a:pt x="4727086" y="2261338"/>
-                  </a:lnTo>
-                  <a:lnTo>
-                    <a:pt x="4655464" y="2248542"/>
-                  </a:lnTo>
-                  <a:lnTo>
-                    <a:pt x="4583841" y="2235401"/>
-                  </a:lnTo>
-                  <a:lnTo>
-                    <a:pt x="4512219" y="2221909"/>
-                  </a:lnTo>
-                  <a:lnTo>
-                    <a:pt x="4440596" y="2208054"/>
-                  </a:lnTo>
-                  <a:lnTo>
-                    <a:pt x="4368974" y="2193827"/>
-                  </a:lnTo>
-                  <a:lnTo>
-                    <a:pt x="4297351" y="2179218"/>
-                  </a:lnTo>
-                  <a:lnTo>
-                    <a:pt x="4225729" y="2164218"/>
-                  </a:lnTo>
-                  <a:lnTo>
-                    <a:pt x="4154106" y="2148815"/>
-                  </a:lnTo>
-                  <a:lnTo>
-                    <a:pt x="4082483" y="2132998"/>
-                  </a:lnTo>
-                  <a:lnTo>
-                    <a:pt x="4010861" y="2116757"/>
-                  </a:lnTo>
-                  <a:lnTo>
-                    <a:pt x="3939238" y="2100080"/>
-                  </a:lnTo>
-                  <a:lnTo>
-                    <a:pt x="3867616" y="2082956"/>
-                  </a:lnTo>
-                  <a:lnTo>
-                    <a:pt x="3795993" y="2065372"/>
-                  </a:lnTo>
-                  <a:lnTo>
-                    <a:pt x="3724371" y="2047316"/>
-                  </a:lnTo>
-                  <a:lnTo>
-                    <a:pt x="3652748" y="2028776"/>
-                  </a:lnTo>
-                  <a:lnTo>
-                    <a:pt x="3581126" y="2009738"/>
-                  </a:lnTo>
-                  <a:lnTo>
-                    <a:pt x="3509503" y="1990189"/>
-                  </a:lnTo>
-                  <a:lnTo>
-                    <a:pt x="3437881" y="1970115"/>
-                  </a:lnTo>
-                  <a:lnTo>
-                    <a:pt x="3366258" y="1949503"/>
-                  </a:lnTo>
-                  <a:lnTo>
-                    <a:pt x="3294636" y="1928338"/>
-                  </a:lnTo>
-                  <a:lnTo>
-                    <a:pt x="3223013" y="1909098"/>
-                  </a:lnTo>
-                  <a:lnTo>
-                    <a:pt x="3151391" y="1913097"/>
-                  </a:lnTo>
-                  <a:lnTo>
-                    <a:pt x="3079768" y="1917076"/>
-                  </a:lnTo>
-                  <a:lnTo>
-                    <a:pt x="3008146" y="1921036"/>
-                  </a:lnTo>
-                  <a:lnTo>
-                    <a:pt x="2936523" y="1924977"/>
-                  </a:lnTo>
-                  <a:lnTo>
-                    <a:pt x="2864901" y="1928899"/>
-                  </a:lnTo>
-                  <a:lnTo>
-                    <a:pt x="2793278" y="1932802"/>
-                  </a:lnTo>
-                  <a:lnTo>
-                    <a:pt x="2721655" y="1936686"/>
-                  </a:lnTo>
-                  <a:lnTo>
-                    <a:pt x="2650033" y="1940551"/>
-                  </a:lnTo>
-                  <a:lnTo>
-                    <a:pt x="2578410" y="1944398"/>
-                  </a:lnTo>
-                  <a:lnTo>
-                    <a:pt x="2506788" y="1948226"/>
-                  </a:lnTo>
-                  <a:lnTo>
-                    <a:pt x="2435165" y="1952036"/>
-                  </a:lnTo>
-                  <a:lnTo>
-                    <a:pt x="2363543" y="1955827"/>
-                  </a:lnTo>
-                  <a:lnTo>
-                    <a:pt x="2291920" y="1959600"/>
-                  </a:lnTo>
-                  <a:lnTo>
-                    <a:pt x="2220298" y="1963355"/>
-                  </a:lnTo>
-                  <a:lnTo>
-                    <a:pt x="2148675" y="1967092"/>
-                  </a:lnTo>
-                  <a:lnTo>
-                    <a:pt x="2077053" y="1970810"/>
-                  </a:lnTo>
-                  <a:lnTo>
-                    <a:pt x="2005430" y="1974511"/>
-                  </a:lnTo>
-                  <a:lnTo>
-                    <a:pt x="1933808" y="1978194"/>
-                  </a:lnTo>
-                  <a:lnTo>
-                    <a:pt x="1862185" y="1981859"/>
-                  </a:lnTo>
-                  <a:lnTo>
-                    <a:pt x="1790563" y="1985507"/>
-                  </a:lnTo>
-                  <a:lnTo>
-                    <a:pt x="1718940" y="1989137"/>
-                  </a:lnTo>
-                  <a:lnTo>
-                    <a:pt x="1647318" y="1992749"/>
-                  </a:lnTo>
-                  <a:lnTo>
-                    <a:pt x="1575695" y="1996344"/>
-                  </a:lnTo>
-                  <a:lnTo>
-                    <a:pt x="1504073" y="1999922"/>
-                  </a:lnTo>
-                  <a:lnTo>
-                    <a:pt x="1432450" y="2003482"/>
-                  </a:lnTo>
-                  <a:lnTo>
-                    <a:pt x="1360827" y="2007025"/>
-                  </a:lnTo>
-                  <a:lnTo>
-                    <a:pt x="1289205" y="2010552"/>
-                  </a:lnTo>
-                  <a:lnTo>
-                    <a:pt x="1217582" y="2014061"/>
-                  </a:lnTo>
-                  <a:lnTo>
-                    <a:pt x="1145960" y="2017553"/>
-                  </a:lnTo>
-                  <a:lnTo>
-                    <a:pt x="1074337" y="2021028"/>
-                  </a:lnTo>
-                  <a:lnTo>
-                    <a:pt x="1002715" y="2024487"/>
-                  </a:lnTo>
-                  <a:lnTo>
-                    <a:pt x="931092" y="2027929"/>
-                  </a:lnTo>
-                  <a:lnTo>
-                    <a:pt x="859470" y="2031354"/>
-                  </a:lnTo>
-                  <a:lnTo>
-                    <a:pt x="787847" y="2034763"/>
-                  </a:lnTo>
-                  <a:lnTo>
-                    <a:pt x="716225" y="2038155"/>
-                  </a:lnTo>
-                  <a:lnTo>
-                    <a:pt x="644602" y="2041531"/>
-                  </a:lnTo>
-                  <a:lnTo>
-                    <a:pt x="572980" y="2044891"/>
-                  </a:lnTo>
-                  <a:lnTo>
-                    <a:pt x="501357" y="2048235"/>
-                  </a:lnTo>
-                  <a:lnTo>
-                    <a:pt x="429735" y="2051562"/>
-                  </a:lnTo>
-                  <a:lnTo>
-                    <a:pt x="358112" y="2054873"/>
-                  </a:lnTo>
-                  <a:lnTo>
-                    <a:pt x="286490" y="2058169"/>
-                  </a:lnTo>
-                  <a:lnTo>
-                    <a:pt x="214867" y="2061448"/>
-                  </a:lnTo>
-                  <a:lnTo>
-                    <a:pt x="143245" y="2064712"/>
-                  </a:lnTo>
-                  <a:lnTo>
-                    <a:pt x="71622" y="2067960"/>
-                  </a:lnTo>
-                  <a:lnTo>
-                    <a:pt x="0" y="2071192"/>
+                    <a:pt x="71622" y="76404"/>
+                  </a:lnTo>
+                  <a:lnTo>
+                    <a:pt x="143245" y="150759"/>
+                  </a:lnTo>
+                  <a:lnTo>
+                    <a:pt x="214867" y="223120"/>
+                  </a:lnTo>
+                  <a:lnTo>
+                    <a:pt x="286490" y="293541"/>
+                  </a:lnTo>
+                  <a:lnTo>
+                    <a:pt x="358112" y="362074"/>
+                  </a:lnTo>
+                  <a:lnTo>
+                    <a:pt x="429735" y="428769"/>
+                  </a:lnTo>
+                  <a:lnTo>
+                    <a:pt x="501357" y="493675"/>
+                  </a:lnTo>
+                  <a:lnTo>
+                    <a:pt x="572980" y="556841"/>
+                  </a:lnTo>
+                  <a:lnTo>
+                    <a:pt x="644602" y="618313"/>
+                  </a:lnTo>
+                  <a:lnTo>
+                    <a:pt x="716225" y="678137"/>
+                  </a:lnTo>
+                  <a:lnTo>
+                    <a:pt x="787847" y="736357"/>
+                  </a:lnTo>
+                  <a:lnTo>
+                    <a:pt x="859470" y="793015"/>
+                  </a:lnTo>
+                  <a:lnTo>
+                    <a:pt x="931092" y="848154"/>
+                  </a:lnTo>
+                  <a:lnTo>
+                    <a:pt x="1002715" y="901815"/>
+                  </a:lnTo>
+                  <a:lnTo>
+                    <a:pt x="1074337" y="954037"/>
+                  </a:lnTo>
+                  <a:lnTo>
+                    <a:pt x="1145960" y="1004858"/>
+                  </a:lnTo>
+                  <a:lnTo>
+                    <a:pt x="1217582" y="1054316"/>
+                  </a:lnTo>
+                  <a:lnTo>
+                    <a:pt x="1289205" y="1102449"/>
+                  </a:lnTo>
+                  <a:lnTo>
+                    <a:pt x="1360827" y="1149290"/>
+                  </a:lnTo>
+                  <a:lnTo>
+                    <a:pt x="1432450" y="1194876"/>
+                  </a:lnTo>
+                  <a:lnTo>
+                    <a:pt x="1504073" y="1239239"/>
+                  </a:lnTo>
+                  <a:lnTo>
+                    <a:pt x="1575695" y="1282412"/>
+                  </a:lnTo>
+                  <a:lnTo>
+                    <a:pt x="1647318" y="1324428"/>
+                  </a:lnTo>
+                  <a:lnTo>
+                    <a:pt x="1718940" y="1365317"/>
+                  </a:lnTo>
+                  <a:lnTo>
+                    <a:pt x="1790563" y="1405110"/>
+                  </a:lnTo>
+                  <a:lnTo>
+                    <a:pt x="1862185" y="1443836"/>
+                  </a:lnTo>
+                  <a:lnTo>
+                    <a:pt x="1933808" y="1481523"/>
+                  </a:lnTo>
+                  <a:lnTo>
+                    <a:pt x="2005430" y="1518200"/>
+                  </a:lnTo>
+                  <a:lnTo>
+                    <a:pt x="2077053" y="1553893"/>
+                  </a:lnTo>
+                  <a:lnTo>
+                    <a:pt x="2148675" y="1588629"/>
+                  </a:lnTo>
+                  <a:lnTo>
+                    <a:pt x="2220298" y="1622433"/>
+                  </a:lnTo>
+                  <a:lnTo>
+                    <a:pt x="2291920" y="1655331"/>
+                  </a:lnTo>
+                  <a:lnTo>
+                    <a:pt x="2363543" y="1687347"/>
+                  </a:lnTo>
+                  <a:lnTo>
+                    <a:pt x="2435165" y="1718505"/>
+                  </a:lnTo>
+                  <a:lnTo>
+                    <a:pt x="2506788" y="1748827"/>
+                  </a:lnTo>
+                  <a:lnTo>
+                    <a:pt x="2578410" y="1778336"/>
+                  </a:lnTo>
+                  <a:lnTo>
+                    <a:pt x="2650033" y="1807053"/>
+                  </a:lnTo>
+                  <a:lnTo>
+                    <a:pt x="2721655" y="1835001"/>
+                  </a:lnTo>
+                  <a:lnTo>
+                    <a:pt x="2793278" y="1862199"/>
+                  </a:lnTo>
+                  <a:lnTo>
+                    <a:pt x="2864901" y="1888667"/>
+                  </a:lnTo>
+                  <a:lnTo>
+                    <a:pt x="2936523" y="1914426"/>
+                  </a:lnTo>
+                  <a:lnTo>
+                    <a:pt x="3008146" y="1939494"/>
+                  </a:lnTo>
+                  <a:lnTo>
+                    <a:pt x="3079768" y="1963890"/>
+                  </a:lnTo>
+                  <a:lnTo>
+                    <a:pt x="3151391" y="1987632"/>
+                  </a:lnTo>
+                  <a:lnTo>
+                    <a:pt x="3223013" y="2010738"/>
+                  </a:lnTo>
+                  <a:lnTo>
+                    <a:pt x="3294636" y="2017313"/>
+                  </a:lnTo>
+                  <a:lnTo>
+                    <a:pt x="3366258" y="2013128"/>
+                  </a:lnTo>
+                  <a:lnTo>
+                    <a:pt x="3437881" y="2008922"/>
+                  </a:lnTo>
+                  <a:lnTo>
+                    <a:pt x="3509503" y="2004695"/>
+                  </a:lnTo>
+                  <a:lnTo>
+                    <a:pt x="3581126" y="2000447"/>
+                  </a:lnTo>
+                  <a:lnTo>
+                    <a:pt x="3652748" y="1996177"/>
+                  </a:lnTo>
+                  <a:lnTo>
+                    <a:pt x="3724371" y="1991886"/>
+                  </a:lnTo>
+                  <a:lnTo>
+                    <a:pt x="3795993" y="1987573"/>
+                  </a:lnTo>
+                  <a:lnTo>
+                    <a:pt x="3867616" y="1983239"/>
+                  </a:lnTo>
+                  <a:lnTo>
+                    <a:pt x="3939238" y="1978882"/>
+                  </a:lnTo>
+                  <a:lnTo>
+                    <a:pt x="4010861" y="1974504"/>
+                  </a:lnTo>
+                  <a:lnTo>
+                    <a:pt x="4082483" y="1970104"/>
+                  </a:lnTo>
+                  <a:lnTo>
+                    <a:pt x="4154106" y="1965681"/>
+                  </a:lnTo>
+                  <a:lnTo>
+                    <a:pt x="4225729" y="1961237"/>
+                  </a:lnTo>
+                  <a:lnTo>
+                    <a:pt x="4297351" y="1956770"/>
+                  </a:lnTo>
+                  <a:lnTo>
+                    <a:pt x="4368974" y="1952280"/>
+                  </a:lnTo>
+                  <a:lnTo>
+                    <a:pt x="4440596" y="1947768"/>
+                  </a:lnTo>
+                  <a:lnTo>
+                    <a:pt x="4512219" y="1943234"/>
+                  </a:lnTo>
+                  <a:lnTo>
+                    <a:pt x="4583841" y="1938676"/>
+                  </a:lnTo>
+                  <a:lnTo>
+                    <a:pt x="4655464" y="1934096"/>
+                  </a:lnTo>
+                  <a:lnTo>
+                    <a:pt x="4727086" y="1929492"/>
+                  </a:lnTo>
+                  <a:lnTo>
+                    <a:pt x="4798709" y="1924865"/>
+                  </a:lnTo>
+                  <a:lnTo>
+                    <a:pt x="4870331" y="1920215"/>
+                  </a:lnTo>
+                  <a:lnTo>
+                    <a:pt x="4941954" y="1915542"/>
+                  </a:lnTo>
+                  <a:lnTo>
+                    <a:pt x="5013576" y="1910845"/>
+                  </a:lnTo>
+                  <a:lnTo>
+                    <a:pt x="5085199" y="1906125"/>
+                  </a:lnTo>
+                  <a:lnTo>
+                    <a:pt x="5156821" y="1901381"/>
+                  </a:lnTo>
+                  <a:lnTo>
+                    <a:pt x="5228444" y="1896613"/>
+                  </a:lnTo>
+                  <a:lnTo>
+                    <a:pt x="5300066" y="1891820"/>
+                  </a:lnTo>
+                  <a:lnTo>
+                    <a:pt x="5371689" y="1887004"/>
+                  </a:lnTo>
+                  <a:lnTo>
+                    <a:pt x="5443311" y="1882164"/>
+                  </a:lnTo>
+                  <a:lnTo>
+                    <a:pt x="5514934" y="1877299"/>
+                  </a:lnTo>
+                  <a:lnTo>
+                    <a:pt x="5586557" y="1872410"/>
+                  </a:lnTo>
+                  <a:lnTo>
+                    <a:pt x="5658179" y="1867496"/>
+                  </a:lnTo>
+                  <a:lnTo>
+                    <a:pt x="5729802" y="1862558"/>
+                  </a:lnTo>
+                  <a:lnTo>
+                    <a:pt x="5801424" y="1857594"/>
+                  </a:lnTo>
+                  <a:lnTo>
+                    <a:pt x="5873047" y="1852606"/>
+                  </a:lnTo>
+                  <a:lnTo>
+                    <a:pt x="5944669" y="1847593"/>
+                  </a:lnTo>
+                  <a:lnTo>
+                    <a:pt x="6016292" y="1842554"/>
+                  </a:lnTo>
+                  <a:lnTo>
+                    <a:pt x="6087914" y="1837490"/>
+                  </a:lnTo>
+                  <a:lnTo>
+                    <a:pt x="6159537" y="1832401"/>
+                  </a:lnTo>
+                  <a:lnTo>
+                    <a:pt x="6231159" y="1827285"/>
+                  </a:lnTo>
+                  <a:lnTo>
+                    <a:pt x="6302782" y="1822145"/>
+                  </a:lnTo>
+                  <a:lnTo>
+                    <a:pt x="6374404" y="1816978"/>
+                  </a:lnTo>
+                  <a:lnTo>
+                    <a:pt x="6446027" y="1811785"/>
+                  </a:lnTo>
+                  <a:lnTo>
+                    <a:pt x="6517649" y="1806567"/>
+                  </a:lnTo>
+                  <a:lnTo>
+                    <a:pt x="6589272" y="1801322"/>
+                  </a:lnTo>
+                  <a:lnTo>
+                    <a:pt x="6660894" y="1796050"/>
+                  </a:lnTo>
+                  <a:lnTo>
+                    <a:pt x="6732517" y="1790752"/>
+                  </a:lnTo>
+                  <a:lnTo>
+                    <a:pt x="6804139" y="1785428"/>
+                  </a:lnTo>
+                  <a:lnTo>
+                    <a:pt x="6875762" y="1780076"/>
+                  </a:lnTo>
+                  <a:lnTo>
+                    <a:pt x="6947385" y="1774698"/>
+                  </a:lnTo>
+                  <a:lnTo>
+                    <a:pt x="7019007" y="1769293"/>
+                  </a:lnTo>
+                  <a:lnTo>
+                    <a:pt x="7090630" y="1763860"/>
+                  </a:lnTo>
+                  <a:lnTo>
+                    <a:pt x="7090630" y="2656049"/>
+                  </a:lnTo>
+                  <a:lnTo>
+                    <a:pt x="7019007" y="2650724"/>
+                  </a:lnTo>
+                  <a:lnTo>
+                    <a:pt x="6947385" y="2645253"/>
+                  </a:lnTo>
+                  <a:lnTo>
+                    <a:pt x="6875762" y="2639632"/>
+                  </a:lnTo>
+                  <a:lnTo>
+                    <a:pt x="6804139" y="2633855"/>
+                  </a:lnTo>
+                  <a:lnTo>
+                    <a:pt x="6732517" y="2627920"/>
+                  </a:lnTo>
+                  <a:lnTo>
+                    <a:pt x="6660894" y="2621820"/>
+                  </a:lnTo>
+                  <a:lnTo>
+                    <a:pt x="6589272" y="2615553"/>
+                  </a:lnTo>
+                  <a:lnTo>
+                    <a:pt x="6517649" y="2609113"/>
+                  </a:lnTo>
+                  <a:lnTo>
+                    <a:pt x="6446027" y="2602495"/>
+                  </a:lnTo>
+                  <a:lnTo>
+                    <a:pt x="6374404" y="2595696"/>
+                  </a:lnTo>
+                  <a:lnTo>
+                    <a:pt x="6302782" y="2588708"/>
+                  </a:lnTo>
+                  <a:lnTo>
+                    <a:pt x="6231159" y="2581529"/>
+                  </a:lnTo>
+                  <a:lnTo>
+                    <a:pt x="6159537" y="2574151"/>
+                  </a:lnTo>
+                  <a:lnTo>
+                    <a:pt x="6087914" y="2566570"/>
+                  </a:lnTo>
+                  <a:lnTo>
+                    <a:pt x="6016292" y="2558781"/>
+                  </a:lnTo>
+                  <a:lnTo>
+                    <a:pt x="5944669" y="2550776"/>
+                  </a:lnTo>
+                  <a:lnTo>
+                    <a:pt x="5873047" y="2542551"/>
+                  </a:lnTo>
+                  <a:lnTo>
+                    <a:pt x="5801424" y="2534100"/>
+                  </a:lnTo>
+                  <a:lnTo>
+                    <a:pt x="5729802" y="2525415"/>
+                  </a:lnTo>
+                  <a:lnTo>
+                    <a:pt x="5658179" y="2516492"/>
+                  </a:lnTo>
+                  <a:lnTo>
+                    <a:pt x="5586557" y="2507322"/>
+                  </a:lnTo>
+                  <a:lnTo>
+                    <a:pt x="5514934" y="2497900"/>
+                  </a:lnTo>
+                  <a:lnTo>
+                    <a:pt x="5443311" y="2488218"/>
+                  </a:lnTo>
+                  <a:lnTo>
+                    <a:pt x="5371689" y="2478269"/>
+                  </a:lnTo>
+                  <a:lnTo>
+                    <a:pt x="5300066" y="2468046"/>
+                  </a:lnTo>
+                  <a:lnTo>
+                    <a:pt x="5228444" y="2457542"/>
+                  </a:lnTo>
+                  <a:lnTo>
+                    <a:pt x="5156821" y="2446748"/>
+                  </a:lnTo>
+                  <a:lnTo>
+                    <a:pt x="5085199" y="2435657"/>
+                  </a:lnTo>
+                  <a:lnTo>
+                    <a:pt x="5013576" y="2424260"/>
+                  </a:lnTo>
+                  <a:lnTo>
+                    <a:pt x="4941954" y="2412549"/>
+                  </a:lnTo>
+                  <a:lnTo>
+                    <a:pt x="4870331" y="2400515"/>
+                  </a:lnTo>
+                  <a:lnTo>
+                    <a:pt x="4798709" y="2388150"/>
+                  </a:lnTo>
+                  <a:lnTo>
+                    <a:pt x="4727086" y="2375444"/>
+                  </a:lnTo>
+                  <a:lnTo>
+                    <a:pt x="4655464" y="2362388"/>
+                  </a:lnTo>
+                  <a:lnTo>
+                    <a:pt x="4583841" y="2348972"/>
+                  </a:lnTo>
+                  <a:lnTo>
+                    <a:pt x="4512219" y="2335187"/>
+                  </a:lnTo>
+                  <a:lnTo>
+                    <a:pt x="4440596" y="2321022"/>
+                  </a:lnTo>
+                  <a:lnTo>
+                    <a:pt x="4368974" y="2306466"/>
+                  </a:lnTo>
+                  <a:lnTo>
+                    <a:pt x="4297351" y="2291510"/>
+                  </a:lnTo>
+                  <a:lnTo>
+                    <a:pt x="4225729" y="2276141"/>
+                  </a:lnTo>
+                  <a:lnTo>
+                    <a:pt x="4154106" y="2260348"/>
+                  </a:lnTo>
+                  <a:lnTo>
+                    <a:pt x="4082483" y="2244121"/>
+                  </a:lnTo>
+                  <a:lnTo>
+                    <a:pt x="4010861" y="2227447"/>
+                  </a:lnTo>
+                  <a:lnTo>
+                    <a:pt x="3939238" y="2210313"/>
+                  </a:lnTo>
+                  <a:lnTo>
+                    <a:pt x="3867616" y="2192707"/>
+                  </a:lnTo>
+                  <a:lnTo>
+                    <a:pt x="3795993" y="2174615"/>
+                  </a:lnTo>
+                  <a:lnTo>
+                    <a:pt x="3724371" y="2156026"/>
+                  </a:lnTo>
+                  <a:lnTo>
+                    <a:pt x="3652748" y="2136924"/>
+                  </a:lnTo>
+                  <a:lnTo>
+                    <a:pt x="3581126" y="2117296"/>
+                  </a:lnTo>
+                  <a:lnTo>
+                    <a:pt x="3509503" y="2097126"/>
+                  </a:lnTo>
+                  <a:lnTo>
+                    <a:pt x="3437881" y="2076402"/>
+                  </a:lnTo>
+                  <a:lnTo>
+                    <a:pt x="3366258" y="2055106"/>
+                  </a:lnTo>
+                  <a:lnTo>
+                    <a:pt x="3294636" y="2033223"/>
+                  </a:lnTo>
+                  <a:lnTo>
+                    <a:pt x="3223013" y="2021477"/>
+                  </a:lnTo>
+                  <a:lnTo>
+                    <a:pt x="3151391" y="2025620"/>
+                  </a:lnTo>
+                  <a:lnTo>
+                    <a:pt x="3079768" y="2029743"/>
+                  </a:lnTo>
+                  <a:lnTo>
+                    <a:pt x="3008146" y="2033845"/>
+                  </a:lnTo>
+                  <a:lnTo>
+                    <a:pt x="2936523" y="2037926"/>
+                  </a:lnTo>
+                  <a:lnTo>
+                    <a:pt x="2864901" y="2041987"/>
+                  </a:lnTo>
+                  <a:lnTo>
+                    <a:pt x="2793278" y="2046027"/>
+                  </a:lnTo>
+                  <a:lnTo>
+                    <a:pt x="2721655" y="2050047"/>
+                  </a:lnTo>
+                  <a:lnTo>
+                    <a:pt x="2650033" y="2054047"/>
+                  </a:lnTo>
+                  <a:lnTo>
+                    <a:pt x="2578410" y="2058028"/>
+                  </a:lnTo>
+                  <a:lnTo>
+                    <a:pt x="2506788" y="2061988"/>
+                  </a:lnTo>
+                  <a:lnTo>
+                    <a:pt x="2435165" y="2065928"/>
+                  </a:lnTo>
+                  <a:lnTo>
+                    <a:pt x="2363543" y="2069849"/>
+                  </a:lnTo>
+                  <a:lnTo>
+                    <a:pt x="2291920" y="2073750"/>
+                  </a:lnTo>
+                  <a:lnTo>
+                    <a:pt x="2220298" y="2077631"/>
+                  </a:lnTo>
+                  <a:lnTo>
+                    <a:pt x="2148675" y="2081493"/>
+                  </a:lnTo>
+                  <a:lnTo>
+                    <a:pt x="2077053" y="2085336"/>
+                  </a:lnTo>
+                  <a:lnTo>
+                    <a:pt x="2005430" y="2089160"/>
+                  </a:lnTo>
+                  <a:lnTo>
+                    <a:pt x="1933808" y="2092964"/>
+                  </a:lnTo>
+                  <a:lnTo>
+                    <a:pt x="1862185" y="2096749"/>
+                  </a:lnTo>
+                  <a:lnTo>
+                    <a:pt x="1790563" y="2100516"/>
+                  </a:lnTo>
+                  <a:lnTo>
+                    <a:pt x="1718940" y="2104263"/>
+                  </a:lnTo>
+                  <a:lnTo>
+                    <a:pt x="1647318" y="2107992"/>
+                  </a:lnTo>
+                  <a:lnTo>
+                    <a:pt x="1575695" y="2111702"/>
+                  </a:lnTo>
+                  <a:lnTo>
+                    <a:pt x="1504073" y="2115394"/>
+                  </a:lnTo>
+                  <a:lnTo>
+                    <a:pt x="1432450" y="2119067"/>
+                  </a:lnTo>
+                  <a:lnTo>
+                    <a:pt x="1360827" y="2122721"/>
+                  </a:lnTo>
+                  <a:lnTo>
+                    <a:pt x="1289205" y="2126358"/>
+                  </a:lnTo>
+                  <a:lnTo>
+                    <a:pt x="1217582" y="2129976"/>
+                  </a:lnTo>
+                  <a:lnTo>
+                    <a:pt x="1145960" y="2133576"/>
+                  </a:lnTo>
+                  <a:lnTo>
+                    <a:pt x="1074337" y="2137158"/>
+                  </a:lnTo>
+                  <a:lnTo>
+                    <a:pt x="1002715" y="2140722"/>
+                  </a:lnTo>
+                  <a:lnTo>
+                    <a:pt x="931092" y="2144269"/>
+                  </a:lnTo>
+                  <a:lnTo>
+                    <a:pt x="859470" y="2147797"/>
+                  </a:lnTo>
+                  <a:lnTo>
+                    <a:pt x="787847" y="2151308"/>
+                  </a:lnTo>
+                  <a:lnTo>
+                    <a:pt x="716225" y="2154801"/>
+                  </a:lnTo>
+                  <a:lnTo>
+                    <a:pt x="644602" y="2158277"/>
+                  </a:lnTo>
+                  <a:lnTo>
+                    <a:pt x="572980" y="2161736"/>
+                  </a:lnTo>
+                  <a:lnTo>
+                    <a:pt x="501357" y="2165177"/>
+                  </a:lnTo>
+                  <a:lnTo>
+                    <a:pt x="429735" y="2168601"/>
+                  </a:lnTo>
+                  <a:lnTo>
+                    <a:pt x="358112" y="2172008"/>
+                  </a:lnTo>
+                  <a:lnTo>
+                    <a:pt x="286490" y="2175397"/>
+                  </a:lnTo>
+                  <a:lnTo>
+                    <a:pt x="214867" y="2178770"/>
+                  </a:lnTo>
+                  <a:lnTo>
+                    <a:pt x="143245" y="2182126"/>
+                  </a:lnTo>
+                  <a:lnTo>
+                    <a:pt x="71622" y="2185465"/>
+                  </a:lnTo>
+                  <a:lnTo>
+                    <a:pt x="0" y="2188787"/>
                   </a:lnTo>
                   <a:close/>
                 </a:path>
@@ -3633,312 +3633,312 @@
           </p:nvSpPr>
           <p:spPr>
             <a:xfrm>
-              <a:off x="1172049" y="2819071"/>
-              <a:ext cx="7090630" cy="1906604"/>
+              <a:off x="1172049" y="2707973"/>
+              <a:ext cx="7090630" cy="2017313"/>
             </a:xfrm>
             <a:custGeom>
               <a:avLst/>
               <a:pathLst>
-                <a:path w="7090630" h="1906604">
+                <a:path w="7090630" h="2017313">
                   <a:moveTo>
                     <a:pt x="0" y="0"/>
                   </a:moveTo>
                   <a:lnTo>
-                    <a:pt x="71622" y="71563"/>
-                  </a:lnTo>
-                  <a:lnTo>
-                    <a:pt x="143245" y="141255"/>
-                  </a:lnTo>
-                  <a:lnTo>
-                    <a:pt x="214867" y="209126"/>
-                  </a:lnTo>
-                  <a:lnTo>
-                    <a:pt x="286490" y="275224"/>
-                  </a:lnTo>
-                  <a:lnTo>
-                    <a:pt x="358112" y="339594"/>
-                  </a:lnTo>
-                  <a:lnTo>
-                    <a:pt x="429735" y="402281"/>
-                  </a:lnTo>
-                  <a:lnTo>
-                    <a:pt x="501357" y="463331"/>
-                  </a:lnTo>
-                  <a:lnTo>
-                    <a:pt x="572980" y="522784"/>
-                  </a:lnTo>
-                  <a:lnTo>
-                    <a:pt x="644602" y="580684"/>
-                  </a:lnTo>
-                  <a:lnTo>
-                    <a:pt x="716225" y="637071"/>
-                  </a:lnTo>
-                  <a:lnTo>
-                    <a:pt x="787847" y="691984"/>
-                  </a:lnTo>
-                  <a:lnTo>
-                    <a:pt x="859470" y="745462"/>
-                  </a:lnTo>
-                  <a:lnTo>
-                    <a:pt x="931092" y="797542"/>
-                  </a:lnTo>
-                  <a:lnTo>
-                    <a:pt x="1002715" y="848261"/>
-                  </a:lnTo>
-                  <a:lnTo>
-                    <a:pt x="1074337" y="897654"/>
-                  </a:lnTo>
-                  <a:lnTo>
-                    <a:pt x="1145960" y="945757"/>
-                  </a:lnTo>
-                  <a:lnTo>
-                    <a:pt x="1217582" y="992602"/>
-                  </a:lnTo>
-                  <a:lnTo>
-                    <a:pt x="1289205" y="1038223"/>
-                  </a:lnTo>
-                  <a:lnTo>
-                    <a:pt x="1360827" y="1082652"/>
-                  </a:lnTo>
-                  <a:lnTo>
-                    <a:pt x="1432450" y="1125920"/>
-                  </a:lnTo>
-                  <a:lnTo>
-                    <a:pt x="1504073" y="1168056"/>
-                  </a:lnTo>
-                  <a:lnTo>
-                    <a:pt x="1575695" y="1209092"/>
-                  </a:lnTo>
-                  <a:lnTo>
-                    <a:pt x="1647318" y="1249055"/>
-                  </a:lnTo>
-                  <a:lnTo>
-                    <a:pt x="1718940" y="1287974"/>
-                  </a:lnTo>
-                  <a:lnTo>
-                    <a:pt x="1790563" y="1325875"/>
-                  </a:lnTo>
-                  <a:lnTo>
-                    <a:pt x="1862185" y="1362786"/>
-                  </a:lnTo>
-                  <a:lnTo>
-                    <a:pt x="1933808" y="1398732"/>
-                  </a:lnTo>
-                  <a:lnTo>
-                    <a:pt x="2005430" y="1433739"/>
-                  </a:lnTo>
-                  <a:lnTo>
-                    <a:pt x="2077053" y="1467831"/>
-                  </a:lnTo>
-                  <a:lnTo>
-                    <a:pt x="2148675" y="1501032"/>
-                  </a:lnTo>
-                  <a:lnTo>
-                    <a:pt x="2220298" y="1533365"/>
-                  </a:lnTo>
-                  <a:lnTo>
-                    <a:pt x="2291920" y="1564853"/>
-                  </a:lnTo>
-                  <a:lnTo>
-                    <a:pt x="2363543" y="1595518"/>
-                  </a:lnTo>
-                  <a:lnTo>
-                    <a:pt x="2435165" y="1625382"/>
-                  </a:lnTo>
-                  <a:lnTo>
-                    <a:pt x="2506788" y="1654465"/>
-                  </a:lnTo>
-                  <a:lnTo>
-                    <a:pt x="2578410" y="1682788"/>
-                  </a:lnTo>
-                  <a:lnTo>
-                    <a:pt x="2650033" y="1710371"/>
-                  </a:lnTo>
-                  <a:lnTo>
-                    <a:pt x="2721655" y="1737233"/>
-                  </a:lnTo>
-                  <a:lnTo>
-                    <a:pt x="2793278" y="1763393"/>
-                  </a:lnTo>
-                  <a:lnTo>
-                    <a:pt x="2864901" y="1788869"/>
-                  </a:lnTo>
-                  <a:lnTo>
-                    <a:pt x="2936523" y="1813680"/>
-                  </a:lnTo>
-                  <a:lnTo>
-                    <a:pt x="3008146" y="1837842"/>
-                  </a:lnTo>
-                  <a:lnTo>
-                    <a:pt x="3079768" y="1861372"/>
-                  </a:lnTo>
-                  <a:lnTo>
-                    <a:pt x="3151391" y="1884288"/>
-                  </a:lnTo>
-                  <a:lnTo>
-                    <a:pt x="3223013" y="1906604"/>
-                  </a:lnTo>
-                  <a:lnTo>
-                    <a:pt x="3294636" y="1905081"/>
-                  </a:lnTo>
-                  <a:lnTo>
-                    <a:pt x="3366258" y="1901043"/>
-                  </a:lnTo>
-                  <a:lnTo>
-                    <a:pt x="3437881" y="1896987"/>
-                  </a:lnTo>
-                  <a:lnTo>
-                    <a:pt x="3509503" y="1892910"/>
-                  </a:lnTo>
-                  <a:lnTo>
-                    <a:pt x="3581126" y="1888814"/>
-                  </a:lnTo>
-                  <a:lnTo>
-                    <a:pt x="3652748" y="1884698"/>
-                  </a:lnTo>
-                  <a:lnTo>
-                    <a:pt x="3724371" y="1880562"/>
-                  </a:lnTo>
-                  <a:lnTo>
-                    <a:pt x="3795993" y="1876406"/>
-                  </a:lnTo>
-                  <a:lnTo>
-                    <a:pt x="3867616" y="1872229"/>
-                  </a:lnTo>
-                  <a:lnTo>
-                    <a:pt x="3939238" y="1868033"/>
-                  </a:lnTo>
-                  <a:lnTo>
-                    <a:pt x="4010861" y="1863816"/>
-                  </a:lnTo>
-                  <a:lnTo>
-                    <a:pt x="4082483" y="1859579"/>
-                  </a:lnTo>
-                  <a:lnTo>
-                    <a:pt x="4154106" y="1855321"/>
-                  </a:lnTo>
-                  <a:lnTo>
-                    <a:pt x="4225729" y="1851043"/>
-                  </a:lnTo>
-                  <a:lnTo>
-                    <a:pt x="4297351" y="1846744"/>
-                  </a:lnTo>
-                  <a:lnTo>
-                    <a:pt x="4368974" y="1842424"/>
-                  </a:lnTo>
-                  <a:lnTo>
-                    <a:pt x="4440596" y="1838083"/>
-                  </a:lnTo>
-                  <a:lnTo>
-                    <a:pt x="4512219" y="1833721"/>
-                  </a:lnTo>
-                  <a:lnTo>
-                    <a:pt x="4583841" y="1829338"/>
-                  </a:lnTo>
-                  <a:lnTo>
-                    <a:pt x="4655464" y="1824933"/>
-                  </a:lnTo>
-                  <a:lnTo>
-                    <a:pt x="4727086" y="1820508"/>
-                  </a:lnTo>
-                  <a:lnTo>
-                    <a:pt x="4798709" y="1816061"/>
-                  </a:lnTo>
-                  <a:lnTo>
-                    <a:pt x="4870331" y="1811592"/>
-                  </a:lnTo>
-                  <a:lnTo>
-                    <a:pt x="4941954" y="1807102"/>
-                  </a:lnTo>
-                  <a:lnTo>
-                    <a:pt x="5013576" y="1802590"/>
-                  </a:lnTo>
-                  <a:lnTo>
-                    <a:pt x="5085199" y="1798056"/>
-                  </a:lnTo>
-                  <a:lnTo>
-                    <a:pt x="5156821" y="1793500"/>
-                  </a:lnTo>
-                  <a:lnTo>
-                    <a:pt x="5228444" y="1788922"/>
-                  </a:lnTo>
-                  <a:lnTo>
-                    <a:pt x="5300066" y="1784322"/>
-                  </a:lnTo>
-                  <a:lnTo>
-                    <a:pt x="5371689" y="1779699"/>
-                  </a:lnTo>
-                  <a:lnTo>
-                    <a:pt x="5443311" y="1775054"/>
-                  </a:lnTo>
-                  <a:lnTo>
-                    <a:pt x="5514934" y="1770387"/>
-                  </a:lnTo>
-                  <a:lnTo>
-                    <a:pt x="5586557" y="1765697"/>
-                  </a:lnTo>
-                  <a:lnTo>
-                    <a:pt x="5658179" y="1760984"/>
-                  </a:lnTo>
-                  <a:lnTo>
-                    <a:pt x="5729802" y="1756249"/>
-                  </a:lnTo>
-                  <a:lnTo>
-                    <a:pt x="5801424" y="1751490"/>
-                  </a:lnTo>
-                  <a:lnTo>
-                    <a:pt x="5873047" y="1746709"/>
-                  </a:lnTo>
-                  <a:lnTo>
-                    <a:pt x="5944669" y="1741904"/>
-                  </a:lnTo>
-                  <a:lnTo>
-                    <a:pt x="6016292" y="1737076"/>
-                  </a:lnTo>
-                  <a:lnTo>
-                    <a:pt x="6087914" y="1732224"/>
-                  </a:lnTo>
-                  <a:lnTo>
-                    <a:pt x="6159537" y="1727349"/>
-                  </a:lnTo>
-                  <a:lnTo>
-                    <a:pt x="6231159" y="1722451"/>
-                  </a:lnTo>
-                  <a:lnTo>
-                    <a:pt x="6302782" y="1717529"/>
-                  </a:lnTo>
-                  <a:lnTo>
-                    <a:pt x="6374404" y="1712582"/>
-                  </a:lnTo>
-                  <a:lnTo>
-                    <a:pt x="6446027" y="1707612"/>
-                  </a:lnTo>
-                  <a:lnTo>
-                    <a:pt x="6517649" y="1702618"/>
-                  </a:lnTo>
-                  <a:lnTo>
-                    <a:pt x="6589272" y="1697600"/>
-                  </a:lnTo>
-                  <a:lnTo>
-                    <a:pt x="6660894" y="1692557"/>
-                  </a:lnTo>
-                  <a:lnTo>
-                    <a:pt x="6732517" y="1687490"/>
-                  </a:lnTo>
-                  <a:lnTo>
-                    <a:pt x="6804139" y="1682398"/>
-                  </a:lnTo>
-                  <a:lnTo>
-                    <a:pt x="6875762" y="1677282"/>
-                  </a:lnTo>
-                  <a:lnTo>
-                    <a:pt x="6947385" y="1672140"/>
-                  </a:lnTo>
-                  <a:lnTo>
-                    <a:pt x="7019007" y="1666974"/>
-                  </a:lnTo>
-                  <a:lnTo>
-                    <a:pt x="7090630" y="1661783"/>
+                    <a:pt x="71622" y="76404"/>
+                  </a:lnTo>
+                  <a:lnTo>
+                    <a:pt x="143245" y="150759"/>
+                  </a:lnTo>
+                  <a:lnTo>
+                    <a:pt x="214867" y="223120"/>
+                  </a:lnTo>
+                  <a:lnTo>
+                    <a:pt x="286490" y="293541"/>
+                  </a:lnTo>
+                  <a:lnTo>
+                    <a:pt x="358112" y="362074"/>
+                  </a:lnTo>
+                  <a:lnTo>
+                    <a:pt x="429735" y="428769"/>
+                  </a:lnTo>
+                  <a:lnTo>
+                    <a:pt x="501357" y="493675"/>
+                  </a:lnTo>
+                  <a:lnTo>
+                    <a:pt x="572980" y="556841"/>
+                  </a:lnTo>
+                  <a:lnTo>
+                    <a:pt x="644602" y="618313"/>
+                  </a:lnTo>
+                  <a:lnTo>
+                    <a:pt x="716225" y="678137"/>
+                  </a:lnTo>
+                  <a:lnTo>
+                    <a:pt x="787847" y="736357"/>
+                  </a:lnTo>
+                  <a:lnTo>
+                    <a:pt x="859470" y="793015"/>
+                  </a:lnTo>
+                  <a:lnTo>
+                    <a:pt x="931092" y="848154"/>
+                  </a:lnTo>
+                  <a:lnTo>
+                    <a:pt x="1002715" y="901815"/>
+                  </a:lnTo>
+                  <a:lnTo>
+                    <a:pt x="1074337" y="954037"/>
+                  </a:lnTo>
+                  <a:lnTo>
+                    <a:pt x="1145960" y="1004858"/>
+                  </a:lnTo>
+                  <a:lnTo>
+                    <a:pt x="1217582" y="1054316"/>
+                  </a:lnTo>
+                  <a:lnTo>
+                    <a:pt x="1289205" y="1102449"/>
+                  </a:lnTo>
+                  <a:lnTo>
+                    <a:pt x="1360827" y="1149290"/>
+                  </a:lnTo>
+                  <a:lnTo>
+                    <a:pt x="1432450" y="1194876"/>
+                  </a:lnTo>
+                  <a:lnTo>
+                    <a:pt x="1504073" y="1239239"/>
+                  </a:lnTo>
+                  <a:lnTo>
+                    <a:pt x="1575695" y="1282412"/>
+                  </a:lnTo>
+                  <a:lnTo>
+                    <a:pt x="1647318" y="1324428"/>
+                  </a:lnTo>
+                  <a:lnTo>
+                    <a:pt x="1718940" y="1365317"/>
+                  </a:lnTo>
+                  <a:lnTo>
+                    <a:pt x="1790563" y="1405110"/>
+                  </a:lnTo>
+                  <a:lnTo>
+                    <a:pt x="1862185" y="1443836"/>
+                  </a:lnTo>
+                  <a:lnTo>
+                    <a:pt x="1933808" y="1481523"/>
+                  </a:lnTo>
+                  <a:lnTo>
+                    <a:pt x="2005430" y="1518200"/>
+                  </a:lnTo>
+                  <a:lnTo>
+                    <a:pt x="2077053" y="1553893"/>
+                  </a:lnTo>
+                  <a:lnTo>
+                    <a:pt x="2148675" y="1588629"/>
+                  </a:lnTo>
+                  <a:lnTo>
+                    <a:pt x="2220298" y="1622433"/>
+                  </a:lnTo>
+                  <a:lnTo>
+                    <a:pt x="2291920" y="1655331"/>
+                  </a:lnTo>
+                  <a:lnTo>
+                    <a:pt x="2363543" y="1687347"/>
+                  </a:lnTo>
+                  <a:lnTo>
+                    <a:pt x="2435165" y="1718505"/>
+                  </a:lnTo>
+                  <a:lnTo>
+                    <a:pt x="2506788" y="1748827"/>
+                  </a:lnTo>
+                  <a:lnTo>
+                    <a:pt x="2578410" y="1778336"/>
+                  </a:lnTo>
+                  <a:lnTo>
+                    <a:pt x="2650033" y="1807053"/>
+                  </a:lnTo>
+                  <a:lnTo>
+                    <a:pt x="2721655" y="1835001"/>
+                  </a:lnTo>
+                  <a:lnTo>
+                    <a:pt x="2793278" y="1862199"/>
+                  </a:lnTo>
+                  <a:lnTo>
+                    <a:pt x="2864901" y="1888667"/>
+                  </a:lnTo>
+                  <a:lnTo>
+                    <a:pt x="2936523" y="1914426"/>
+                  </a:lnTo>
+                  <a:lnTo>
+                    <a:pt x="3008146" y="1939494"/>
+                  </a:lnTo>
+                  <a:lnTo>
+                    <a:pt x="3079768" y="1963890"/>
+                  </a:lnTo>
+                  <a:lnTo>
+                    <a:pt x="3151391" y="1987632"/>
+                  </a:lnTo>
+                  <a:lnTo>
+                    <a:pt x="3223013" y="2010738"/>
+                  </a:lnTo>
+                  <a:lnTo>
+                    <a:pt x="3294636" y="2017313"/>
+                  </a:lnTo>
+                  <a:lnTo>
+                    <a:pt x="3366258" y="2013128"/>
+                  </a:lnTo>
+                  <a:lnTo>
+                    <a:pt x="3437881" y="2008922"/>
+                  </a:lnTo>
+                  <a:lnTo>
+                    <a:pt x="3509503" y="2004695"/>
+                  </a:lnTo>
+                  <a:lnTo>
+                    <a:pt x="3581126" y="2000447"/>
+                  </a:lnTo>
+                  <a:lnTo>
+                    <a:pt x="3652748" y="1996177"/>
+                  </a:lnTo>
+                  <a:lnTo>
+                    <a:pt x="3724371" y="1991886"/>
+                  </a:lnTo>
+                  <a:lnTo>
+                    <a:pt x="3795993" y="1987573"/>
+                  </a:lnTo>
+                  <a:lnTo>
+                    <a:pt x="3867616" y="1983239"/>
+                  </a:lnTo>
+                  <a:lnTo>
+                    <a:pt x="3939238" y="1978882"/>
+                  </a:lnTo>
+                  <a:lnTo>
+                    <a:pt x="4010861" y="1974504"/>
+                  </a:lnTo>
+                  <a:lnTo>
+                    <a:pt x="4082483" y="1970104"/>
+                  </a:lnTo>
+                  <a:lnTo>
+                    <a:pt x="4154106" y="1965681"/>
+                  </a:lnTo>
+                  <a:lnTo>
+                    <a:pt x="4225729" y="1961237"/>
+                  </a:lnTo>
+                  <a:lnTo>
+                    <a:pt x="4297351" y="1956770"/>
+                  </a:lnTo>
+                  <a:lnTo>
+                    <a:pt x="4368974" y="1952280"/>
+                  </a:lnTo>
+                  <a:lnTo>
+                    <a:pt x="4440596" y="1947768"/>
+                  </a:lnTo>
+                  <a:lnTo>
+                    <a:pt x="4512219" y="1943234"/>
+                  </a:lnTo>
+                  <a:lnTo>
+                    <a:pt x="4583841" y="1938676"/>
+                  </a:lnTo>
+                  <a:lnTo>
+                    <a:pt x="4655464" y="1934096"/>
+                  </a:lnTo>
+                  <a:lnTo>
+                    <a:pt x="4727086" y="1929492"/>
+                  </a:lnTo>
+                  <a:lnTo>
+                    <a:pt x="4798709" y="1924865"/>
+                  </a:lnTo>
+                  <a:lnTo>
+                    <a:pt x="4870331" y="1920215"/>
+                  </a:lnTo>
+                  <a:lnTo>
+                    <a:pt x="4941954" y="1915542"/>
+                  </a:lnTo>
+                  <a:lnTo>
+                    <a:pt x="5013576" y="1910845"/>
+                  </a:lnTo>
+                  <a:lnTo>
+                    <a:pt x="5085199" y="1906125"/>
+                  </a:lnTo>
+                  <a:lnTo>
+                    <a:pt x="5156821" y="1901381"/>
+                  </a:lnTo>
+                  <a:lnTo>
+                    <a:pt x="5228444" y="1896613"/>
+                  </a:lnTo>
+                  <a:lnTo>
+                    <a:pt x="5300066" y="1891820"/>
+                  </a:lnTo>
+                  <a:lnTo>
+                    <a:pt x="5371689" y="1887004"/>
+                  </a:lnTo>
+                  <a:lnTo>
+                    <a:pt x="5443311" y="1882164"/>
+                  </a:lnTo>
+                  <a:lnTo>
+                    <a:pt x="5514934" y="1877299"/>
+                  </a:lnTo>
+                  <a:lnTo>
+                    <a:pt x="5586557" y="1872410"/>
+                  </a:lnTo>
+                  <a:lnTo>
+                    <a:pt x="5658179" y="1867496"/>
+                  </a:lnTo>
+                  <a:lnTo>
+                    <a:pt x="5729802" y="1862558"/>
+                  </a:lnTo>
+                  <a:lnTo>
+                    <a:pt x="5801424" y="1857594"/>
+                  </a:lnTo>
+                  <a:lnTo>
+                    <a:pt x="5873047" y="1852606"/>
+                  </a:lnTo>
+                  <a:lnTo>
+                    <a:pt x="5944669" y="1847593"/>
+                  </a:lnTo>
+                  <a:lnTo>
+                    <a:pt x="6016292" y="1842554"/>
+                  </a:lnTo>
+                  <a:lnTo>
+                    <a:pt x="6087914" y="1837490"/>
+                  </a:lnTo>
+                  <a:lnTo>
+                    <a:pt x="6159537" y="1832401"/>
+                  </a:lnTo>
+                  <a:lnTo>
+                    <a:pt x="6231159" y="1827285"/>
+                  </a:lnTo>
+                  <a:lnTo>
+                    <a:pt x="6302782" y="1822145"/>
+                  </a:lnTo>
+                  <a:lnTo>
+                    <a:pt x="6374404" y="1816978"/>
+                  </a:lnTo>
+                  <a:lnTo>
+                    <a:pt x="6446027" y="1811785"/>
+                  </a:lnTo>
+                  <a:lnTo>
+                    <a:pt x="6517649" y="1806567"/>
+                  </a:lnTo>
+                  <a:lnTo>
+                    <a:pt x="6589272" y="1801322"/>
+                  </a:lnTo>
+                  <a:lnTo>
+                    <a:pt x="6660894" y="1796050"/>
+                  </a:lnTo>
+                  <a:lnTo>
+                    <a:pt x="6732517" y="1790752"/>
+                  </a:lnTo>
+                  <a:lnTo>
+                    <a:pt x="6804139" y="1785428"/>
+                  </a:lnTo>
+                  <a:lnTo>
+                    <a:pt x="6875762" y="1780076"/>
+                  </a:lnTo>
+                  <a:lnTo>
+                    <a:pt x="6947385" y="1774698"/>
+                  </a:lnTo>
+                  <a:lnTo>
+                    <a:pt x="7019007" y="1769293"/>
+                  </a:lnTo>
+                  <a:lnTo>
+                    <a:pt x="7090630" y="1763860"/>
                   </a:lnTo>
                 </a:path>
               </a:pathLst>
@@ -3958,312 +3958,312 @@
           </p:nvSpPr>
           <p:spPr>
             <a:xfrm>
-              <a:off x="1172049" y="4728170"/>
-              <a:ext cx="7090630" cy="630090"/>
+              <a:off x="1172049" y="4729450"/>
+              <a:ext cx="7090630" cy="634571"/>
             </a:xfrm>
             <a:custGeom>
               <a:avLst/>
               <a:pathLst>
-                <a:path w="7090630" h="630090">
+                <a:path w="7090630" h="634571">
                   <a:moveTo>
-                    <a:pt x="7090630" y="630090"/>
+                    <a:pt x="7090630" y="634571"/>
                   </a:moveTo>
                   <a:lnTo>
-                    <a:pt x="7019007" y="624750"/>
-                  </a:lnTo>
-                  <a:lnTo>
-                    <a:pt x="6947385" y="619267"/>
-                  </a:lnTo>
-                  <a:lnTo>
-                    <a:pt x="6875762" y="613636"/>
-                  </a:lnTo>
-                  <a:lnTo>
-                    <a:pt x="6804139" y="607854"/>
-                  </a:lnTo>
-                  <a:lnTo>
-                    <a:pt x="6732517" y="601917"/>
-                  </a:lnTo>
-                  <a:lnTo>
-                    <a:pt x="6660894" y="595821"/>
-                  </a:lnTo>
-                  <a:lnTo>
-                    <a:pt x="6589272" y="589561"/>
-                  </a:lnTo>
-                  <a:lnTo>
-                    <a:pt x="6517649" y="583134"/>
-                  </a:lnTo>
-                  <a:lnTo>
-                    <a:pt x="6446027" y="576533"/>
-                  </a:lnTo>
-                  <a:lnTo>
-                    <a:pt x="6374404" y="569756"/>
-                  </a:lnTo>
-                  <a:lnTo>
-                    <a:pt x="6302782" y="562796"/>
-                  </a:lnTo>
-                  <a:lnTo>
-                    <a:pt x="6231159" y="555650"/>
-                  </a:lnTo>
-                  <a:lnTo>
-                    <a:pt x="6159537" y="548312"/>
-                  </a:lnTo>
-                  <a:lnTo>
-                    <a:pt x="6087914" y="540778"/>
-                  </a:lnTo>
-                  <a:lnTo>
-                    <a:pt x="6016292" y="533040"/>
-                  </a:lnTo>
-                  <a:lnTo>
-                    <a:pt x="5944669" y="525096"/>
-                  </a:lnTo>
-                  <a:lnTo>
-                    <a:pt x="5873047" y="516938"/>
-                  </a:lnTo>
-                  <a:lnTo>
-                    <a:pt x="5801424" y="508561"/>
-                  </a:lnTo>
-                  <a:lnTo>
-                    <a:pt x="5729802" y="499960"/>
-                  </a:lnTo>
-                  <a:lnTo>
-                    <a:pt x="5658179" y="491127"/>
-                  </a:lnTo>
-                  <a:lnTo>
-                    <a:pt x="5586557" y="482058"/>
-                  </a:lnTo>
-                  <a:lnTo>
-                    <a:pt x="5514934" y="472745"/>
-                  </a:lnTo>
-                  <a:lnTo>
-                    <a:pt x="5443311" y="463182"/>
-                  </a:lnTo>
-                  <a:lnTo>
-                    <a:pt x="5371689" y="453362"/>
-                  </a:lnTo>
-                  <a:lnTo>
-                    <a:pt x="5300066" y="443280"/>
-                  </a:lnTo>
-                  <a:lnTo>
-                    <a:pt x="5228444" y="432926"/>
-                  </a:lnTo>
-                  <a:lnTo>
-                    <a:pt x="5156821" y="422295"/>
-                  </a:lnTo>
-                  <a:lnTo>
-                    <a:pt x="5085199" y="411378"/>
-                  </a:lnTo>
-                  <a:lnTo>
-                    <a:pt x="5013576" y="400168"/>
-                  </a:lnTo>
-                  <a:lnTo>
-                    <a:pt x="4941954" y="388658"/>
-                  </a:lnTo>
-                  <a:lnTo>
-                    <a:pt x="4870331" y="376838"/>
-                  </a:lnTo>
-                  <a:lnTo>
-                    <a:pt x="4798709" y="364702"/>
-                  </a:lnTo>
-                  <a:lnTo>
-                    <a:pt x="4727086" y="352239"/>
-                  </a:lnTo>
-                  <a:lnTo>
-                    <a:pt x="4655464" y="339443"/>
-                  </a:lnTo>
-                  <a:lnTo>
-                    <a:pt x="4583841" y="326302"/>
-                  </a:lnTo>
-                  <a:lnTo>
-                    <a:pt x="4512219" y="312810"/>
-                  </a:lnTo>
-                  <a:lnTo>
-                    <a:pt x="4440596" y="298955"/>
-                  </a:lnTo>
-                  <a:lnTo>
-                    <a:pt x="4368974" y="284728"/>
-                  </a:lnTo>
-                  <a:lnTo>
-                    <a:pt x="4297351" y="270119"/>
-                  </a:lnTo>
-                  <a:lnTo>
-                    <a:pt x="4225729" y="255119"/>
-                  </a:lnTo>
-                  <a:lnTo>
-                    <a:pt x="4154106" y="239716"/>
-                  </a:lnTo>
-                  <a:lnTo>
-                    <a:pt x="4082483" y="223899"/>
-                  </a:lnTo>
-                  <a:lnTo>
-                    <a:pt x="4010861" y="207658"/>
-                  </a:lnTo>
-                  <a:lnTo>
-                    <a:pt x="3939238" y="190981"/>
-                  </a:lnTo>
-                  <a:lnTo>
-                    <a:pt x="3867616" y="173857"/>
-                  </a:lnTo>
-                  <a:lnTo>
-                    <a:pt x="3795993" y="156273"/>
-                  </a:lnTo>
-                  <a:lnTo>
-                    <a:pt x="3724371" y="138217"/>
-                  </a:lnTo>
-                  <a:lnTo>
-                    <a:pt x="3652748" y="119677"/>
-                  </a:lnTo>
-                  <a:lnTo>
-                    <a:pt x="3581126" y="100639"/>
-                  </a:lnTo>
-                  <a:lnTo>
-                    <a:pt x="3509503" y="81090"/>
-                  </a:lnTo>
-                  <a:lnTo>
-                    <a:pt x="3437881" y="61016"/>
-                  </a:lnTo>
-                  <a:lnTo>
-                    <a:pt x="3366258" y="40404"/>
-                  </a:lnTo>
-                  <a:lnTo>
-                    <a:pt x="3294636" y="19239"/>
+                    <a:pt x="7019007" y="629247"/>
+                  </a:lnTo>
+                  <a:lnTo>
+                    <a:pt x="6947385" y="623776"/>
+                  </a:lnTo>
+                  <a:lnTo>
+                    <a:pt x="6875762" y="618154"/>
+                  </a:lnTo>
+                  <a:lnTo>
+                    <a:pt x="6804139" y="612377"/>
+                  </a:lnTo>
+                  <a:lnTo>
+                    <a:pt x="6732517" y="606442"/>
+                  </a:lnTo>
+                  <a:lnTo>
+                    <a:pt x="6660894" y="600342"/>
+                  </a:lnTo>
+                  <a:lnTo>
+                    <a:pt x="6589272" y="594075"/>
+                  </a:lnTo>
+                  <a:lnTo>
+                    <a:pt x="6517649" y="587635"/>
+                  </a:lnTo>
+                  <a:lnTo>
+                    <a:pt x="6446027" y="581018"/>
+                  </a:lnTo>
+                  <a:lnTo>
+                    <a:pt x="6374404" y="574218"/>
+                  </a:lnTo>
+                  <a:lnTo>
+                    <a:pt x="6302782" y="567231"/>
+                  </a:lnTo>
+                  <a:lnTo>
+                    <a:pt x="6231159" y="560051"/>
+                  </a:lnTo>
+                  <a:lnTo>
+                    <a:pt x="6159537" y="552673"/>
+                  </a:lnTo>
+                  <a:lnTo>
+                    <a:pt x="6087914" y="545092"/>
+                  </a:lnTo>
+                  <a:lnTo>
+                    <a:pt x="6016292" y="537303"/>
+                  </a:lnTo>
+                  <a:lnTo>
+                    <a:pt x="5944669" y="529298"/>
+                  </a:lnTo>
+                  <a:lnTo>
+                    <a:pt x="5873047" y="521073"/>
+                  </a:lnTo>
+                  <a:lnTo>
+                    <a:pt x="5801424" y="512622"/>
+                  </a:lnTo>
+                  <a:lnTo>
+                    <a:pt x="5729802" y="503938"/>
+                  </a:lnTo>
+                  <a:lnTo>
+                    <a:pt x="5658179" y="495014"/>
+                  </a:lnTo>
+                  <a:lnTo>
+                    <a:pt x="5586557" y="485844"/>
+                  </a:lnTo>
+                  <a:lnTo>
+                    <a:pt x="5514934" y="476422"/>
+                  </a:lnTo>
+                  <a:lnTo>
+                    <a:pt x="5443311" y="466740"/>
+                  </a:lnTo>
+                  <a:lnTo>
+                    <a:pt x="5371689" y="456791"/>
+                  </a:lnTo>
+                  <a:lnTo>
+                    <a:pt x="5300066" y="446569"/>
+                  </a:lnTo>
+                  <a:lnTo>
+                    <a:pt x="5228444" y="436064"/>
+                  </a:lnTo>
+                  <a:lnTo>
+                    <a:pt x="5156821" y="425270"/>
+                  </a:lnTo>
+                  <a:lnTo>
+                    <a:pt x="5085199" y="414179"/>
+                  </a:lnTo>
+                  <a:lnTo>
+                    <a:pt x="5013576" y="402782"/>
+                  </a:lnTo>
+                  <a:lnTo>
+                    <a:pt x="4941954" y="391071"/>
+                  </a:lnTo>
+                  <a:lnTo>
+                    <a:pt x="4870331" y="379038"/>
+                  </a:lnTo>
+                  <a:lnTo>
+                    <a:pt x="4798709" y="366672"/>
+                  </a:lnTo>
+                  <a:lnTo>
+                    <a:pt x="4727086" y="353966"/>
+                  </a:lnTo>
+                  <a:lnTo>
+                    <a:pt x="4655464" y="340910"/>
+                  </a:lnTo>
+                  <a:lnTo>
+                    <a:pt x="4583841" y="327495"/>
+                  </a:lnTo>
+                  <a:lnTo>
+                    <a:pt x="4512219" y="313709"/>
+                  </a:lnTo>
+                  <a:lnTo>
+                    <a:pt x="4440596" y="299544"/>
+                  </a:lnTo>
+                  <a:lnTo>
+                    <a:pt x="4368974" y="284988"/>
+                  </a:lnTo>
+                  <a:lnTo>
+                    <a:pt x="4297351" y="270032"/>
+                  </a:lnTo>
+                  <a:lnTo>
+                    <a:pt x="4225729" y="254663"/>
+                  </a:lnTo>
+                  <a:lnTo>
+                    <a:pt x="4154106" y="238871"/>
+                  </a:lnTo>
+                  <a:lnTo>
+                    <a:pt x="4082483" y="222643"/>
+                  </a:lnTo>
+                  <a:lnTo>
+                    <a:pt x="4010861" y="205969"/>
+                  </a:lnTo>
+                  <a:lnTo>
+                    <a:pt x="3939238" y="188835"/>
+                  </a:lnTo>
+                  <a:lnTo>
+                    <a:pt x="3867616" y="171229"/>
+                  </a:lnTo>
+                  <a:lnTo>
+                    <a:pt x="3795993" y="153138"/>
+                  </a:lnTo>
+                  <a:lnTo>
+                    <a:pt x="3724371" y="134548"/>
+                  </a:lnTo>
+                  <a:lnTo>
+                    <a:pt x="3652748" y="115446"/>
+                  </a:lnTo>
+                  <a:lnTo>
+                    <a:pt x="3581126" y="95818"/>
+                  </a:lnTo>
+                  <a:lnTo>
+                    <a:pt x="3509503" y="75649"/>
+                  </a:lnTo>
+                  <a:lnTo>
+                    <a:pt x="3437881" y="54924"/>
+                  </a:lnTo>
+                  <a:lnTo>
+                    <a:pt x="3366258" y="33628"/>
+                  </a:lnTo>
+                  <a:lnTo>
+                    <a:pt x="3294636" y="11745"/>
                   </a:lnTo>
                   <a:lnTo>
                     <a:pt x="3223013" y="0"/>
                   </a:lnTo>
                   <a:lnTo>
-                    <a:pt x="3151391" y="3998"/>
-                  </a:lnTo>
-                  <a:lnTo>
-                    <a:pt x="3079768" y="7977"/>
-                  </a:lnTo>
-                  <a:lnTo>
-                    <a:pt x="3008146" y="11937"/>
-                  </a:lnTo>
-                  <a:lnTo>
-                    <a:pt x="2936523" y="15878"/>
-                  </a:lnTo>
-                  <a:lnTo>
-                    <a:pt x="2864901" y="19800"/>
-                  </a:lnTo>
-                  <a:lnTo>
-                    <a:pt x="2793278" y="23703"/>
-                  </a:lnTo>
-                  <a:lnTo>
-                    <a:pt x="2721655" y="27587"/>
-                  </a:lnTo>
-                  <a:lnTo>
-                    <a:pt x="2650033" y="31452"/>
-                  </a:lnTo>
-                  <a:lnTo>
-                    <a:pt x="2578410" y="35299"/>
-                  </a:lnTo>
-                  <a:lnTo>
-                    <a:pt x="2506788" y="39127"/>
-                  </a:lnTo>
-                  <a:lnTo>
-                    <a:pt x="2435165" y="42937"/>
-                  </a:lnTo>
-                  <a:lnTo>
-                    <a:pt x="2363543" y="46728"/>
-                  </a:lnTo>
-                  <a:lnTo>
-                    <a:pt x="2291920" y="50501"/>
-                  </a:lnTo>
-                  <a:lnTo>
-                    <a:pt x="2220298" y="54256"/>
-                  </a:lnTo>
-                  <a:lnTo>
-                    <a:pt x="2148675" y="57993"/>
-                  </a:lnTo>
-                  <a:lnTo>
-                    <a:pt x="2077053" y="61711"/>
-                  </a:lnTo>
-                  <a:lnTo>
-                    <a:pt x="2005430" y="65412"/>
-                  </a:lnTo>
-                  <a:lnTo>
-                    <a:pt x="1933808" y="69095"/>
-                  </a:lnTo>
-                  <a:lnTo>
-                    <a:pt x="1862185" y="72760"/>
-                  </a:lnTo>
-                  <a:lnTo>
-                    <a:pt x="1790563" y="76408"/>
-                  </a:lnTo>
-                  <a:lnTo>
-                    <a:pt x="1718940" y="80038"/>
-                  </a:lnTo>
-                  <a:lnTo>
-                    <a:pt x="1647318" y="83650"/>
-                  </a:lnTo>
-                  <a:lnTo>
-                    <a:pt x="1575695" y="87245"/>
-                  </a:lnTo>
-                  <a:lnTo>
-                    <a:pt x="1504073" y="90823"/>
-                  </a:lnTo>
-                  <a:lnTo>
-                    <a:pt x="1432450" y="94383"/>
-                  </a:lnTo>
-                  <a:lnTo>
-                    <a:pt x="1360827" y="97926"/>
-                  </a:lnTo>
-                  <a:lnTo>
-                    <a:pt x="1289205" y="101453"/>
-                  </a:lnTo>
-                  <a:lnTo>
-                    <a:pt x="1217582" y="104962"/>
-                  </a:lnTo>
-                  <a:lnTo>
-                    <a:pt x="1145960" y="108454"/>
-                  </a:lnTo>
-                  <a:lnTo>
-                    <a:pt x="1074337" y="111929"/>
-                  </a:lnTo>
-                  <a:lnTo>
-                    <a:pt x="1002715" y="115388"/>
-                  </a:lnTo>
-                  <a:lnTo>
-                    <a:pt x="931092" y="118830"/>
-                  </a:lnTo>
-                  <a:lnTo>
-                    <a:pt x="859470" y="122255"/>
-                  </a:lnTo>
-                  <a:lnTo>
-                    <a:pt x="787847" y="125664"/>
-                  </a:lnTo>
-                  <a:lnTo>
-                    <a:pt x="716225" y="129056"/>
-                  </a:lnTo>
-                  <a:lnTo>
-                    <a:pt x="644602" y="132432"/>
-                  </a:lnTo>
-                  <a:lnTo>
-                    <a:pt x="572980" y="135792"/>
-                  </a:lnTo>
-                  <a:lnTo>
-                    <a:pt x="501357" y="139136"/>
-                  </a:lnTo>
-                  <a:lnTo>
-                    <a:pt x="429735" y="142463"/>
-                  </a:lnTo>
-                  <a:lnTo>
-                    <a:pt x="358112" y="145774"/>
-                  </a:lnTo>
-                  <a:lnTo>
-                    <a:pt x="286490" y="149070"/>
-                  </a:lnTo>
-                  <a:lnTo>
-                    <a:pt x="214867" y="152349"/>
-                  </a:lnTo>
-                  <a:lnTo>
-                    <a:pt x="143245" y="155613"/>
-                  </a:lnTo>
-                  <a:lnTo>
-                    <a:pt x="71622" y="158861"/>
-                  </a:lnTo>
-                  <a:lnTo>
-                    <a:pt x="0" y="162093"/>
+                    <a:pt x="3151391" y="4143"/>
+                  </a:lnTo>
+                  <a:lnTo>
+                    <a:pt x="3079768" y="8265"/>
+                  </a:lnTo>
+                  <a:lnTo>
+                    <a:pt x="3008146" y="12367"/>
+                  </a:lnTo>
+                  <a:lnTo>
+                    <a:pt x="2936523" y="16448"/>
+                  </a:lnTo>
+                  <a:lnTo>
+                    <a:pt x="2864901" y="20509"/>
+                  </a:lnTo>
+                  <a:lnTo>
+                    <a:pt x="2793278" y="24549"/>
+                  </a:lnTo>
+                  <a:lnTo>
+                    <a:pt x="2721655" y="28570"/>
+                  </a:lnTo>
+                  <a:lnTo>
+                    <a:pt x="2650033" y="32570"/>
+                  </a:lnTo>
+                  <a:lnTo>
+                    <a:pt x="2578410" y="36550"/>
+                  </a:lnTo>
+                  <a:lnTo>
+                    <a:pt x="2506788" y="40510"/>
+                  </a:lnTo>
+                  <a:lnTo>
+                    <a:pt x="2435165" y="44450"/>
+                  </a:lnTo>
+                  <a:lnTo>
+                    <a:pt x="2363543" y="48371"/>
+                  </a:lnTo>
+                  <a:lnTo>
+                    <a:pt x="2291920" y="52272"/>
+                  </a:lnTo>
+                  <a:lnTo>
+                    <a:pt x="2220298" y="56154"/>
+                  </a:lnTo>
+                  <a:lnTo>
+                    <a:pt x="2148675" y="60016"/>
+                  </a:lnTo>
+                  <a:lnTo>
+                    <a:pt x="2077053" y="63858"/>
+                  </a:lnTo>
+                  <a:lnTo>
+                    <a:pt x="2005430" y="67682"/>
+                  </a:lnTo>
+                  <a:lnTo>
+                    <a:pt x="1933808" y="71486"/>
+                  </a:lnTo>
+                  <a:lnTo>
+                    <a:pt x="1862185" y="75272"/>
+                  </a:lnTo>
+                  <a:lnTo>
+                    <a:pt x="1790563" y="79038"/>
+                  </a:lnTo>
+                  <a:lnTo>
+                    <a:pt x="1718940" y="82785"/>
+                  </a:lnTo>
+                  <a:lnTo>
+                    <a:pt x="1647318" y="86514"/>
+                  </a:lnTo>
+                  <a:lnTo>
+                    <a:pt x="1575695" y="90224"/>
+                  </a:lnTo>
+                  <a:lnTo>
+                    <a:pt x="1504073" y="93916"/>
+                  </a:lnTo>
+                  <a:lnTo>
+                    <a:pt x="1432450" y="97589"/>
+                  </a:lnTo>
+                  <a:lnTo>
+                    <a:pt x="1360827" y="101244"/>
+                  </a:lnTo>
+                  <a:lnTo>
+                    <a:pt x="1289205" y="104880"/>
+                  </a:lnTo>
+                  <a:lnTo>
+                    <a:pt x="1217582" y="108498"/>
+                  </a:lnTo>
+                  <a:lnTo>
+                    <a:pt x="1145960" y="112098"/>
+                  </a:lnTo>
+                  <a:lnTo>
+                    <a:pt x="1074337" y="115680"/>
+                  </a:lnTo>
+                  <a:lnTo>
+                    <a:pt x="1002715" y="119245"/>
+                  </a:lnTo>
+                  <a:lnTo>
+                    <a:pt x="931092" y="122791"/>
+                  </a:lnTo>
+                  <a:lnTo>
+                    <a:pt x="859470" y="126319"/>
+                  </a:lnTo>
+                  <a:lnTo>
+                    <a:pt x="787847" y="129830"/>
+                  </a:lnTo>
+                  <a:lnTo>
+                    <a:pt x="716225" y="133324"/>
+                  </a:lnTo>
+                  <a:lnTo>
+                    <a:pt x="644602" y="136800"/>
+                  </a:lnTo>
+                  <a:lnTo>
+                    <a:pt x="572980" y="140258"/>
+                  </a:lnTo>
+                  <a:lnTo>
+                    <a:pt x="501357" y="143699"/>
+                  </a:lnTo>
+                  <a:lnTo>
+                    <a:pt x="429735" y="147123"/>
+                  </a:lnTo>
+                  <a:lnTo>
+                    <a:pt x="358112" y="150530"/>
+                  </a:lnTo>
+                  <a:lnTo>
+                    <a:pt x="286490" y="153920"/>
+                  </a:lnTo>
+                  <a:lnTo>
+                    <a:pt x="214867" y="157292"/>
+                  </a:lnTo>
+                  <a:lnTo>
+                    <a:pt x="143245" y="160648"/>
+                  </a:lnTo>
+                  <a:lnTo>
+                    <a:pt x="71622" y="163987"/>
+                  </a:lnTo>
+                  <a:lnTo>
+                    <a:pt x="0" y="167310"/>
                   </a:lnTo>
                 </a:path>
               </a:pathLst>
@@ -4283,312 +4283,312 @@
           </p:nvSpPr>
           <p:spPr>
             <a:xfrm>
-              <a:off x="1172049" y="4205834"/>
-              <a:ext cx="7090630" cy="888609"/>
+              <a:off x="1172049" y="4185420"/>
+              <a:ext cx="7090630" cy="913863"/>
             </a:xfrm>
             <a:custGeom>
               <a:avLst/>
               <a:pathLst>
-                <a:path w="7090630" h="888609">
+                <a:path w="7090630" h="913863">
                   <a:moveTo>
                     <a:pt x="0" y="0"/>
                   </a:moveTo>
                   <a:lnTo>
-                    <a:pt x="71622" y="14549"/>
-                  </a:lnTo>
-                  <a:lnTo>
-                    <a:pt x="143245" y="28941"/>
-                  </a:lnTo>
-                  <a:lnTo>
-                    <a:pt x="214867" y="43179"/>
-                  </a:lnTo>
-                  <a:lnTo>
-                    <a:pt x="286490" y="57263"/>
-                  </a:lnTo>
-                  <a:lnTo>
-                    <a:pt x="358112" y="71196"/>
-                  </a:lnTo>
-                  <a:lnTo>
-                    <a:pt x="429735" y="84978"/>
-                  </a:lnTo>
-                  <a:lnTo>
-                    <a:pt x="501357" y="98613"/>
-                  </a:lnTo>
-                  <a:lnTo>
-                    <a:pt x="572980" y="112100"/>
-                  </a:lnTo>
-                  <a:lnTo>
-                    <a:pt x="644602" y="125443"/>
-                  </a:lnTo>
-                  <a:lnTo>
-                    <a:pt x="716225" y="138641"/>
-                  </a:lnTo>
-                  <a:lnTo>
-                    <a:pt x="787847" y="151698"/>
-                  </a:lnTo>
-                  <a:lnTo>
-                    <a:pt x="859470" y="164614"/>
-                  </a:lnTo>
-                  <a:lnTo>
-                    <a:pt x="931092" y="177391"/>
-                  </a:lnTo>
-                  <a:lnTo>
-                    <a:pt x="1002715" y="190030"/>
-                  </a:lnTo>
-                  <a:lnTo>
-                    <a:pt x="1074337" y="202533"/>
-                  </a:lnTo>
-                  <a:lnTo>
-                    <a:pt x="1145960" y="214902"/>
-                  </a:lnTo>
-                  <a:lnTo>
-                    <a:pt x="1217582" y="227138"/>
-                  </a:lnTo>
-                  <a:lnTo>
-                    <a:pt x="1289205" y="239241"/>
-                  </a:lnTo>
-                  <a:lnTo>
-                    <a:pt x="1360827" y="251215"/>
-                  </a:lnTo>
-                  <a:lnTo>
-                    <a:pt x="1432450" y="263060"/>
-                  </a:lnTo>
-                  <a:lnTo>
-                    <a:pt x="1504073" y="274777"/>
-                  </a:lnTo>
-                  <a:lnTo>
-                    <a:pt x="1575695" y="286368"/>
-                  </a:lnTo>
-                  <a:lnTo>
-                    <a:pt x="1647318" y="297834"/>
-                  </a:lnTo>
-                  <a:lnTo>
-                    <a:pt x="1718940" y="309177"/>
-                  </a:lnTo>
-                  <a:lnTo>
-                    <a:pt x="1790563" y="320397"/>
-                  </a:lnTo>
-                  <a:lnTo>
-                    <a:pt x="1862185" y="331497"/>
-                  </a:lnTo>
-                  <a:lnTo>
-                    <a:pt x="1933808" y="342477"/>
-                  </a:lnTo>
-                  <a:lnTo>
-                    <a:pt x="2005430" y="353339"/>
-                  </a:lnTo>
-                  <a:lnTo>
-                    <a:pt x="2077053" y="364084"/>
-                  </a:lnTo>
-                  <a:lnTo>
-                    <a:pt x="2148675" y="374714"/>
-                  </a:lnTo>
-                  <a:lnTo>
-                    <a:pt x="2220298" y="385229"/>
-                  </a:lnTo>
-                  <a:lnTo>
-                    <a:pt x="2291920" y="395631"/>
-                  </a:lnTo>
-                  <a:lnTo>
-                    <a:pt x="2363543" y="405921"/>
-                  </a:lnTo>
-                  <a:lnTo>
-                    <a:pt x="2435165" y="416100"/>
-                  </a:lnTo>
-                  <a:lnTo>
-                    <a:pt x="2506788" y="426169"/>
-                  </a:lnTo>
-                  <a:lnTo>
-                    <a:pt x="2578410" y="436130"/>
-                  </a:lnTo>
-                  <a:lnTo>
-                    <a:pt x="2650033" y="445984"/>
-                  </a:lnTo>
-                  <a:lnTo>
-                    <a:pt x="2721655" y="455732"/>
-                  </a:lnTo>
-                  <a:lnTo>
-                    <a:pt x="2793278" y="465375"/>
-                  </a:lnTo>
-                  <a:lnTo>
-                    <a:pt x="2864901" y="474914"/>
-                  </a:lnTo>
-                  <a:lnTo>
-                    <a:pt x="2936523" y="484350"/>
-                  </a:lnTo>
-                  <a:lnTo>
-                    <a:pt x="3008146" y="493685"/>
-                  </a:lnTo>
-                  <a:lnTo>
-                    <a:pt x="3079768" y="502919"/>
-                  </a:lnTo>
-                  <a:lnTo>
-                    <a:pt x="3151391" y="512054"/>
-                  </a:lnTo>
-                  <a:lnTo>
-                    <a:pt x="3223013" y="521090"/>
-                  </a:lnTo>
-                  <a:lnTo>
-                    <a:pt x="3294636" y="530029"/>
-                  </a:lnTo>
-                  <a:lnTo>
-                    <a:pt x="3366258" y="538872"/>
-                  </a:lnTo>
-                  <a:lnTo>
-                    <a:pt x="3437881" y="547620"/>
-                  </a:lnTo>
-                  <a:lnTo>
-                    <a:pt x="3509503" y="556274"/>
-                  </a:lnTo>
-                  <a:lnTo>
-                    <a:pt x="3581126" y="564834"/>
-                  </a:lnTo>
-                  <a:lnTo>
-                    <a:pt x="3652748" y="573302"/>
-                  </a:lnTo>
-                  <a:lnTo>
-                    <a:pt x="3724371" y="581679"/>
-                  </a:lnTo>
-                  <a:lnTo>
-                    <a:pt x="3795993" y="589966"/>
-                  </a:lnTo>
-                  <a:lnTo>
-                    <a:pt x="3867616" y="598164"/>
-                  </a:lnTo>
-                  <a:lnTo>
-                    <a:pt x="3939238" y="606273"/>
-                  </a:lnTo>
-                  <a:lnTo>
-                    <a:pt x="4010861" y="614295"/>
-                  </a:lnTo>
-                  <a:lnTo>
-                    <a:pt x="4082483" y="622231"/>
-                  </a:lnTo>
-                  <a:lnTo>
-                    <a:pt x="4154106" y="630081"/>
-                  </a:lnTo>
-                  <a:lnTo>
-                    <a:pt x="4225729" y="637847"/>
-                  </a:lnTo>
-                  <a:lnTo>
-                    <a:pt x="4297351" y="645529"/>
-                  </a:lnTo>
-                  <a:lnTo>
-                    <a:pt x="4368974" y="653129"/>
-                  </a:lnTo>
-                  <a:lnTo>
-                    <a:pt x="4440596" y="660646"/>
-                  </a:lnTo>
-                  <a:lnTo>
-                    <a:pt x="4512219" y="668083"/>
-                  </a:lnTo>
-                  <a:lnTo>
-                    <a:pt x="4583841" y="675440"/>
-                  </a:lnTo>
-                  <a:lnTo>
-                    <a:pt x="4655464" y="682717"/>
-                  </a:lnTo>
-                  <a:lnTo>
-                    <a:pt x="4727086" y="689916"/>
-                  </a:lnTo>
-                  <a:lnTo>
-                    <a:pt x="4798709" y="697038"/>
-                  </a:lnTo>
-                  <a:lnTo>
-                    <a:pt x="4870331" y="704083"/>
-                  </a:lnTo>
-                  <a:lnTo>
-                    <a:pt x="4941954" y="711052"/>
-                  </a:lnTo>
-                  <a:lnTo>
-                    <a:pt x="5013576" y="717946"/>
-                  </a:lnTo>
-                  <a:lnTo>
-                    <a:pt x="5085199" y="724766"/>
-                  </a:lnTo>
-                  <a:lnTo>
-                    <a:pt x="5156821" y="731512"/>
-                  </a:lnTo>
-                  <a:lnTo>
-                    <a:pt x="5228444" y="738186"/>
-                  </a:lnTo>
-                  <a:lnTo>
-                    <a:pt x="5300066" y="744788"/>
-                  </a:lnTo>
-                  <a:lnTo>
-                    <a:pt x="5371689" y="751319"/>
-                  </a:lnTo>
-                  <a:lnTo>
-                    <a:pt x="5443311" y="757780"/>
-                  </a:lnTo>
-                  <a:lnTo>
-                    <a:pt x="5514934" y="764171"/>
-                  </a:lnTo>
-                  <a:lnTo>
-                    <a:pt x="5586557" y="770493"/>
-                  </a:lnTo>
-                  <a:lnTo>
-                    <a:pt x="5658179" y="776747"/>
-                  </a:lnTo>
-                  <a:lnTo>
-                    <a:pt x="5729802" y="782934"/>
-                  </a:lnTo>
-                  <a:lnTo>
-                    <a:pt x="5801424" y="789054"/>
-                  </a:lnTo>
-                  <a:lnTo>
-                    <a:pt x="5873047" y="795108"/>
-                  </a:lnTo>
-                  <a:lnTo>
-                    <a:pt x="5944669" y="801097"/>
-                  </a:lnTo>
-                  <a:lnTo>
-                    <a:pt x="6016292" y="807022"/>
-                  </a:lnTo>
-                  <a:lnTo>
-                    <a:pt x="6087914" y="812883"/>
-                  </a:lnTo>
-                  <a:lnTo>
-                    <a:pt x="6159537" y="818681"/>
-                  </a:lnTo>
-                  <a:lnTo>
-                    <a:pt x="6231159" y="824416"/>
-                  </a:lnTo>
-                  <a:lnTo>
-                    <a:pt x="6302782" y="830090"/>
-                  </a:lnTo>
-                  <a:lnTo>
-                    <a:pt x="6374404" y="835702"/>
-                  </a:lnTo>
-                  <a:lnTo>
-                    <a:pt x="6446027" y="841254"/>
-                  </a:lnTo>
-                  <a:lnTo>
-                    <a:pt x="6517649" y="846747"/>
-                  </a:lnTo>
-                  <a:lnTo>
-                    <a:pt x="6589272" y="852180"/>
-                  </a:lnTo>
-                  <a:lnTo>
-                    <a:pt x="6660894" y="857554"/>
-                  </a:lnTo>
-                  <a:lnTo>
-                    <a:pt x="6732517" y="862871"/>
-                  </a:lnTo>
-                  <a:lnTo>
-                    <a:pt x="6804139" y="868131"/>
-                  </a:lnTo>
-                  <a:lnTo>
-                    <a:pt x="6875762" y="873334"/>
-                  </a:lnTo>
-                  <a:lnTo>
-                    <a:pt x="6947385" y="878481"/>
-                  </a:lnTo>
-                  <a:lnTo>
-                    <a:pt x="7019007" y="883572"/>
-                  </a:lnTo>
-                  <a:lnTo>
-                    <a:pt x="7090630" y="888609"/>
+                    <a:pt x="71622" y="15118"/>
+                  </a:lnTo>
+                  <a:lnTo>
+                    <a:pt x="143245" y="30070"/>
+                  </a:lnTo>
+                  <a:lnTo>
+                    <a:pt x="214867" y="44857"/>
+                  </a:lnTo>
+                  <a:lnTo>
+                    <a:pt x="286490" y="59481"/>
+                  </a:lnTo>
+                  <a:lnTo>
+                    <a:pt x="358112" y="73944"/>
+                  </a:lnTo>
+                  <a:lnTo>
+                    <a:pt x="429735" y="88248"/>
+                  </a:lnTo>
+                  <a:lnTo>
+                    <a:pt x="501357" y="102394"/>
+                  </a:lnTo>
+                  <a:lnTo>
+                    <a:pt x="572980" y="116384"/>
+                  </a:lnTo>
+                  <a:lnTo>
+                    <a:pt x="644602" y="130220"/>
+                  </a:lnTo>
+                  <a:lnTo>
+                    <a:pt x="716225" y="143903"/>
+                  </a:lnTo>
+                  <a:lnTo>
+                    <a:pt x="787847" y="157436"/>
+                  </a:lnTo>
+                  <a:lnTo>
+                    <a:pt x="859470" y="170819"/>
+                  </a:lnTo>
+                  <a:lnTo>
+                    <a:pt x="931092" y="184055"/>
+                  </a:lnTo>
+                  <a:lnTo>
+                    <a:pt x="1002715" y="197145"/>
+                  </a:lnTo>
+                  <a:lnTo>
+                    <a:pt x="1074337" y="210091"/>
+                  </a:lnTo>
+                  <a:lnTo>
+                    <a:pt x="1145960" y="222894"/>
+                  </a:lnTo>
+                  <a:lnTo>
+                    <a:pt x="1217582" y="235556"/>
+                  </a:lnTo>
+                  <a:lnTo>
+                    <a:pt x="1289205" y="248079"/>
+                  </a:lnTo>
+                  <a:lnTo>
+                    <a:pt x="1360827" y="260463"/>
+                  </a:lnTo>
+                  <a:lnTo>
+                    <a:pt x="1432450" y="272711"/>
+                  </a:lnTo>
+                  <a:lnTo>
+                    <a:pt x="1504073" y="284825"/>
+                  </a:lnTo>
+                  <a:lnTo>
+                    <a:pt x="1575695" y="296804"/>
+                  </a:lnTo>
+                  <a:lnTo>
+                    <a:pt x="1647318" y="308652"/>
+                  </a:lnTo>
+                  <a:lnTo>
+                    <a:pt x="1718940" y="320369"/>
+                  </a:lnTo>
+                  <a:lnTo>
+                    <a:pt x="1790563" y="331956"/>
+                  </a:lnTo>
+                  <a:lnTo>
+                    <a:pt x="1862185" y="343417"/>
+                  </a:lnTo>
+                  <a:lnTo>
+                    <a:pt x="1933808" y="354750"/>
+                  </a:lnTo>
+                  <a:lnTo>
+                    <a:pt x="2005430" y="365959"/>
+                  </a:lnTo>
+                  <a:lnTo>
+                    <a:pt x="2077053" y="377045"/>
+                  </a:lnTo>
+                  <a:lnTo>
+                    <a:pt x="2148675" y="388008"/>
+                  </a:lnTo>
+                  <a:lnTo>
+                    <a:pt x="2220298" y="398850"/>
+                  </a:lnTo>
+                  <a:lnTo>
+                    <a:pt x="2291920" y="409573"/>
+                  </a:lnTo>
+                  <a:lnTo>
+                    <a:pt x="2363543" y="420178"/>
+                  </a:lnTo>
+                  <a:lnTo>
+                    <a:pt x="2435165" y="430666"/>
+                  </a:lnTo>
+                  <a:lnTo>
+                    <a:pt x="2506788" y="441038"/>
+                  </a:lnTo>
+                  <a:lnTo>
+                    <a:pt x="2578410" y="451296"/>
+                  </a:lnTo>
+                  <a:lnTo>
+                    <a:pt x="2650033" y="461441"/>
+                  </a:lnTo>
+                  <a:lnTo>
+                    <a:pt x="2721655" y="471474"/>
+                  </a:lnTo>
+                  <a:lnTo>
+                    <a:pt x="2793278" y="481397"/>
+                  </a:lnTo>
+                  <a:lnTo>
+                    <a:pt x="2864901" y="491210"/>
+                  </a:lnTo>
+                  <a:lnTo>
+                    <a:pt x="2936523" y="500915"/>
+                  </a:lnTo>
+                  <a:lnTo>
+                    <a:pt x="3008146" y="510513"/>
+                  </a:lnTo>
+                  <a:lnTo>
+                    <a:pt x="3079768" y="520005"/>
+                  </a:lnTo>
+                  <a:lnTo>
+                    <a:pt x="3151391" y="529393"/>
+                  </a:lnTo>
+                  <a:lnTo>
+                    <a:pt x="3223013" y="538677"/>
+                  </a:lnTo>
+                  <a:lnTo>
+                    <a:pt x="3294636" y="547859"/>
+                  </a:lnTo>
+                  <a:lnTo>
+                    <a:pt x="3366258" y="556940"/>
+                  </a:lnTo>
+                  <a:lnTo>
+                    <a:pt x="3437881" y="565921"/>
+                  </a:lnTo>
+                  <a:lnTo>
+                    <a:pt x="3509503" y="574802"/>
+                  </a:lnTo>
+                  <a:lnTo>
+                    <a:pt x="3581126" y="583586"/>
+                  </a:lnTo>
+                  <a:lnTo>
+                    <a:pt x="3652748" y="592273"/>
+                  </a:lnTo>
+                  <a:lnTo>
+                    <a:pt x="3724371" y="600864"/>
+                  </a:lnTo>
+                  <a:lnTo>
+                    <a:pt x="3795993" y="609361"/>
+                  </a:lnTo>
+                  <a:lnTo>
+                    <a:pt x="3867616" y="617764"/>
+                  </a:lnTo>
+                  <a:lnTo>
+                    <a:pt x="3939238" y="626074"/>
+                  </a:lnTo>
+                  <a:lnTo>
+                    <a:pt x="4010861" y="634293"/>
+                  </a:lnTo>
+                  <a:lnTo>
+                    <a:pt x="4082483" y="642421"/>
+                  </a:lnTo>
+                  <a:lnTo>
+                    <a:pt x="4154106" y="650460"/>
+                  </a:lnTo>
+                  <a:lnTo>
+                    <a:pt x="4225729" y="658410"/>
+                  </a:lnTo>
+                  <a:lnTo>
+                    <a:pt x="4297351" y="666272"/>
+                  </a:lnTo>
+                  <a:lnTo>
+                    <a:pt x="4368974" y="674048"/>
+                  </a:lnTo>
+                  <a:lnTo>
+                    <a:pt x="4440596" y="681738"/>
+                  </a:lnTo>
+                  <a:lnTo>
+                    <a:pt x="4512219" y="689343"/>
+                  </a:lnTo>
+                  <a:lnTo>
+                    <a:pt x="4583841" y="696865"/>
+                  </a:lnTo>
+                  <a:lnTo>
+                    <a:pt x="4655464" y="704303"/>
+                  </a:lnTo>
+                  <a:lnTo>
+                    <a:pt x="4727086" y="711660"/>
+                  </a:lnTo>
+                  <a:lnTo>
+                    <a:pt x="4798709" y="718935"/>
+                  </a:lnTo>
+                  <a:lnTo>
+                    <a:pt x="4870331" y="726131"/>
+                  </a:lnTo>
+                  <a:lnTo>
+                    <a:pt x="4941954" y="733247"/>
+                  </a:lnTo>
+                  <a:lnTo>
+                    <a:pt x="5013576" y="740284"/>
+                  </a:lnTo>
+                  <a:lnTo>
+                    <a:pt x="5085199" y="747244"/>
+                  </a:lnTo>
+                  <a:lnTo>
+                    <a:pt x="5156821" y="754128"/>
+                  </a:lnTo>
+                  <a:lnTo>
+                    <a:pt x="5228444" y="760935"/>
+                  </a:lnTo>
+                  <a:lnTo>
+                    <a:pt x="5300066" y="767668"/>
+                  </a:lnTo>
+                  <a:lnTo>
+                    <a:pt x="5371689" y="774326"/>
+                  </a:lnTo>
+                  <a:lnTo>
+                    <a:pt x="5443311" y="780911"/>
+                  </a:lnTo>
+                  <a:lnTo>
+                    <a:pt x="5514934" y="787423"/>
+                  </a:lnTo>
+                  <a:lnTo>
+                    <a:pt x="5586557" y="793864"/>
+                  </a:lnTo>
+                  <a:lnTo>
+                    <a:pt x="5658179" y="800233"/>
+                  </a:lnTo>
+                  <a:lnTo>
+                    <a:pt x="5729802" y="806533"/>
+                  </a:lnTo>
+                  <a:lnTo>
+                    <a:pt x="5801424" y="812763"/>
+                  </a:lnTo>
+                  <a:lnTo>
+                    <a:pt x="5873047" y="818924"/>
+                  </a:lnTo>
+                  <a:lnTo>
+                    <a:pt x="5944669" y="825017"/>
+                  </a:lnTo>
+                  <a:lnTo>
+                    <a:pt x="6016292" y="831044"/>
+                  </a:lnTo>
+                  <a:lnTo>
+                    <a:pt x="6087914" y="837004"/>
+                  </a:lnTo>
+                  <a:lnTo>
+                    <a:pt x="6159537" y="842898"/>
+                  </a:lnTo>
+                  <a:lnTo>
+                    <a:pt x="6231159" y="848727"/>
+                  </a:lnTo>
+                  <a:lnTo>
+                    <a:pt x="6302782" y="854492"/>
+                  </a:lnTo>
+                  <a:lnTo>
+                    <a:pt x="6374404" y="860193"/>
+                  </a:lnTo>
+                  <a:lnTo>
+                    <a:pt x="6446027" y="865832"/>
+                  </a:lnTo>
+                  <a:lnTo>
+                    <a:pt x="6517649" y="871408"/>
+                  </a:lnTo>
+                  <a:lnTo>
+                    <a:pt x="6589272" y="876923"/>
+                  </a:lnTo>
+                  <a:lnTo>
+                    <a:pt x="6660894" y="882377"/>
+                  </a:lnTo>
+                  <a:lnTo>
+                    <a:pt x="6732517" y="887772"/>
+                  </a:lnTo>
+                  <a:lnTo>
+                    <a:pt x="6804139" y="893106"/>
+                  </a:lnTo>
+                  <a:lnTo>
+                    <a:pt x="6875762" y="898382"/>
+                  </a:lnTo>
+                  <a:lnTo>
+                    <a:pt x="6947385" y="903600"/>
+                  </a:lnTo>
+                  <a:lnTo>
+                    <a:pt x="7019007" y="908760"/>
+                  </a:lnTo>
+                  <a:lnTo>
+                    <a:pt x="7090630" y="913863"/>
                   </a:lnTo>
                 </a:path>
               </a:pathLst>
@@ -4660,7 +4660,7 @@
           </p:nvSpPr>
           <p:spPr>
             <a:xfrm>
-              <a:off x="4401933" y="2073503"/>
+              <a:off x="4423736" y="2073503"/>
               <a:ext cx="0" cy="3649639"/>
             </a:xfrm>
             <a:custGeom>
@@ -4703,7 +4703,7 @@
           </p:nvSpPr>
           <p:spPr>
             <a:xfrm>
-              <a:off x="3507589" y="2073503"/>
+              <a:off x="3470882" y="2073503"/>
               <a:ext cx="0" cy="3649639"/>
             </a:xfrm>
             <a:custGeom>
@@ -4746,7 +4746,7 @@
           </p:nvSpPr>
           <p:spPr>
             <a:xfrm>
-              <a:off x="5433405" y="2073503"/>
+              <a:off x="5437283" y="2073503"/>
               <a:ext cx="0" cy="3649639"/>
             </a:xfrm>
             <a:custGeom>
@@ -5019,7 +5019,7 @@
           </p:nvSpPr>
           <p:spPr>
             <a:xfrm>
-              <a:off x="842324" y="5785772"/>
+              <a:off x="843419" y="5785772"/>
               <a:ext cx="161574" cy="80101"/>
             </a:xfrm>
             <a:prstGeom prst="rect">
@@ -5065,7 +5065,7 @@
           </p:nvSpPr>
           <p:spPr>
             <a:xfrm>
-              <a:off x="2941414" y="5785772"/>
+              <a:off x="2938545" y="5785772"/>
               <a:ext cx="161574" cy="80101"/>
             </a:xfrm>
             <a:prstGeom prst="rect">
@@ -5111,7 +5111,7 @@
           </p:nvSpPr>
           <p:spPr>
             <a:xfrm>
-              <a:off x="5090202" y="5785772"/>
+              <a:off x="5083370" y="5785772"/>
               <a:ext cx="62179" cy="80101"/>
             </a:xfrm>
             <a:prstGeom prst="rect">
@@ -5157,7 +5157,7 @@
           </p:nvSpPr>
           <p:spPr>
             <a:xfrm>
-              <a:off x="7158203" y="5785772"/>
+              <a:off x="7147407" y="5785772"/>
               <a:ext cx="124358" cy="80101"/>
             </a:xfrm>
             <a:prstGeom prst="rect">
@@ -5328,7 +5328,7 @@
                   <a:latin typeface="Helvetica"/>
                   <a:cs typeface="Helvetica"/>
                 </a:rPr>
-                <a:t>subHR per 10 % decline: 1.14 (0.94-1.36), p_Bonf = 1.000 (n = 6)  |  per IQR decline (Δ = 22.9 %): 1.34 (0.88-2.04)  |  IQR: [-19.2, 3.7] %</a:t>
+                <a:t>subHR per 10 % decline: 1.14 (0.94-1.37), p_Bonf = 1.000 (n = 6)  |  per IQR decline (Δ = 23.5 %): 1.36 (0.87-2.11)  |  IQR: [-19.6, 3.9] %</a:t>
               </a:r>
             </a:p>
           </p:txBody>
